--- a/和AI作朋友-工作坊簡報.pptx
+++ b/和AI作朋友-工作坊簡報.pptx
@@ -18673,7 +18673,7 @@
               </a:defRPr>
             </a:pPr>
             <a:r>
-              <a:t>AI 嵌進你的工具裡</a:t>
+              <a:t>AI 直接嵌在你的工具裡</a:t>
             </a:r>
           </a:p>
         </p:txBody>
@@ -18876,7 +18876,7 @@
               </a:defRPr>
             </a:pPr>
             <a:r>
-              <a:t>AI Agent</a:t>
+              <a:t>AI Agent（初級助理）</a:t>
             </a:r>
           </a:p>
         </p:txBody>
@@ -19196,7 +19196,7 @@
               </a:defRPr>
             </a:pPr>
             <a:r>
-              <a:t>它記得你的偏好</a:t>
+              <a:t>你規劃步驟，AI 幫你操作電腦</a:t>
             </a:r>
           </a:p>
         </p:txBody>
@@ -19235,7 +19235,7 @@
               </a:defRPr>
             </a:pPr>
             <a:r>
-              <a:t>Skills、MCP</a:t>
+              <a:t>Claude Code / CLIo</a:t>
             </a:r>
           </a:p>
         </p:txBody>
@@ -19438,7 +19438,7 @@
               </a:defRPr>
             </a:pPr>
             <a:r>
-              <a:t>自動完成、主動建議</a:t>
+              <a:t>AI 幫你規劃步驟，幫你操作電腦</a:t>
             </a:r>
           </a:p>
         </p:txBody>

--- a/和AI作朋友-工作坊簡報.pptx
+++ b/和AI作朋友-工作坊簡報.pptx
@@ -42,7 +42,6 @@
     <p:sldId id="290" r:id="rId42"/>
     <p:sldId id="291" r:id="rId43"/>
     <p:sldId id="292" r:id="rId44"/>
-    <p:sldId id="293" r:id="rId45"/>
   </p:sldIdLst>
   <p:sldSz cx="12191695" cy="6858000" type="screen4x3"/>
   <p:notesSz cx="6858000" cy="9144000"/>
@@ -1855,7 +1854,7 @@
           <a:p/>
           <a:p>
             <a:r>
-              <a:t>接下來的順序：函數本質 → 學測落點例子 → 28×28 手寫辨識例子 → 總結表 → 接龍函數 → 輪盤/溫度 → Token → 訓練三階段 → 幻覺 → 觀察重點 → 不該丟給 AI。</a:t>
+              <a:t>接下來的順序：函數本質 → 學測落點例子 → 28×28 手寫辨識例子 → 總結表 → 接龍函數 → 輪盤/溫度 → Token → 幻覺 → 觀察重點 → 不該丟給 AI。</a:t>
             </a:r>
           </a:p>
         </p:txBody>
@@ -2613,28 +2612,19 @@
           <a:lstStyle/>
           <a:p>
             <a:r>
-              <a:t>三階段：</a:t>
-            </a:r>
-          </a:p>
-          <a:p>
-            <a:r>
-              <a:t>1. 預訓練：餵整個網路的文字，學語言模式（最耗運算的階段）</a:t>
-            </a:r>
-          </a:p>
-          <a:p>
-            <a:r>
-              <a:t>2. 微調（Fine-tuning）：針對「當助理」這個任務專門練習</a:t>
-            </a:r>
-          </a:p>
-          <a:p>
-            <a:r>
-              <a:t>3. RLHF（Reinforcement Learning from Human Feedback）：人類告訴它什麼是好答案、什麼是壞答案，學會避免有害回應</a:t>
+              <a:t>關鍵連結：把幻覺接回前面講的「輪盤+猜字」機制。</a:t>
             </a:r>
           </a:p>
           <a:p/>
           <a:p>
             <a:r>
-              <a:t>這是 ChatGPT、Claude 之類的 chat 模型怎麼煉出來的。</a:t>
+              <a:t>AI 不是在「回憶事實」（它沒有資料庫），是在「猜下一個最可能的字」。如果它沒看過這個事實，但「聽起來像真的」的字機率高，它就會吐出來——這就是幻覺。</a:t>
+            </a:r>
+          </a:p>
+          <a:p/>
+          <a:p>
+            <a:r>
+              <a:t>實驗：用一個 AI 不太熟的台灣史問題（1920 雲林農民組合抗議），測四家 AI，看誰會編、誰會老實說「不確定」。</a:t>
             </a:r>
           </a:p>
         </p:txBody>
@@ -2704,19 +2694,25 @@
           <a:lstStyle/>
           <a:p>
             <a:r>
-              <a:t>關鍵連結：把幻覺接回前面講的「輪盤+猜字」機制。</a:t>
+              <a:t>觀察四家 AI 的差異：通常會看到「四個 AI 給你四個版本的歷史」。</a:t>
             </a:r>
           </a:p>
           <a:p/>
           <a:p>
             <a:r>
-              <a:t>AI 不是在「回憶事實」（它沒有資料庫），是在「猜下一個最可能的字」。如果它沒看過這個事實，但「聽起來像真的」的字機率高，它就會吐出來——這就是幻覺。</a:t>
+              <a:t>關鍵警告：「大學教授一年看幾千份學習歷程，你掰的他看得出來。」</a:t>
             </a:r>
           </a:p>
           <a:p/>
           <a:p>
             <a:r>
-              <a:t>實驗：用一個 AI 不太熟的台灣史問題（1920 雲林農民組合抗議），測四家 AI，看誰會編、誰會老實說「不確定」。</a:t>
+              <a:t>結論：AI 不是知識庫，是語言模型——所以才需要 NotebookLM 這種「有餵資料、有出處」的工具。</a:t>
+            </a:r>
+          </a:p>
+          <a:p/>
+          <a:p>
+            <a:r>
+              <a:t>這也是把整場工作坊收回主線：為什麼一定要從 NotebookLM 開始而不是 ChatGPT。</a:t>
             </a:r>
           </a:p>
         </p:txBody>
@@ -2786,25 +2782,29 @@
           <a:lstStyle/>
           <a:p>
             <a:r>
-              <a:t>觀察四家 AI 的差異：通常會看到「四個 AI 給你四個版本的歷史」。</a:t>
+              <a:t>另一條紅線：什麼東西不該丟雲端。</a:t>
             </a:r>
           </a:p>
           <a:p/>
           <a:p>
             <a:r>
-              <a:t>關鍵警告：「大學教授一年看幾千份學習歷程，你掰的他看得出來。」</a:t>
+              <a:t>理論上，你打進去的每個字都離開了你的電腦——進了 OpenAI/Anthropic/Google 的伺服器。</a:t>
+            </a:r>
+          </a:p>
+          <a:p>
+            <a:r>
+              <a:t>- 不要丟：日記、感情、家裡狀況、同學個資、輔導紀錄、未公開的競賽作品</a:t>
+            </a:r>
+          </a:p>
+          <a:p>
+            <a:r>
+              <a:t>- 進階解法（點到為止）：本機 AI（如 ollama + 開源模型）跑在自己筆電上，資料不外流</a:t>
             </a:r>
           </a:p>
           <a:p/>
           <a:p>
             <a:r>
-              <a:t>結論：AI 不是知識庫，是語言模型——所以才需要 NotebookLM 這種「有餵資料、有出處」的工具。</a:t>
-            </a:r>
-          </a:p>
-          <a:p/>
-          <a:p>
-            <a:r>
-              <a:t>這也是把整場工作坊收回主線：為什麼一定要從 NotebookLM 開始而不是 ChatGPT。</a:t>
+              <a:t>判準：「這段話如果被截圖貼到網路上，我會崩潰嗎？」會 → 別丟雲端。</a:t>
             </a:r>
           </a:p>
         </p:txBody>
@@ -2874,29 +2874,19 @@
           <a:lstStyle/>
           <a:p>
             <a:r>
-              <a:t>另一條紅線：什麼東西不該丟雲端。</a:t>
+              <a:t>把今天做的東西全部攤開——全部圍繞同一主題：「為什麼是雲林？」</a:t>
             </a:r>
           </a:p>
           <a:p/>
           <a:p>
             <a:r>
-              <a:t>理論上，你打進去的每個字都離開了你的電腦——進了 OpenAI/Anthropic/Google 的伺服器。</a:t>
-            </a:r>
-          </a:p>
-          <a:p>
-            <a:r>
-              <a:t>- 不要丟：日記、感情、家裡狀況、同學個資、輔導紀錄、未公開的競賽作品</a:t>
-            </a:r>
-          </a:p>
-          <a:p>
-            <a:r>
-              <a:t>- 進階解法（點到為止）：本機 AI（如 ollama + 開源模型）跑在自己筆電上，資料不外流</a:t>
+              <a:t>三小時前學生還在煩惱學習歷程怎麼寫，現在手上有 Word + 簡報，可能還有互動網頁。</a:t>
             </a:r>
           </a:p>
           <a:p/>
           <a:p>
             <a:r>
-              <a:t>判準：「這段話如果被截圖貼到網路上，我會崩潰嗎？」會 → 別丟雲端。</a:t>
+              <a:t>這就是 Lv.3 的成果——三小時用 AI 做出別人三週才做得出的成品。</a:t>
             </a:r>
           </a:p>
         </p:txBody>
@@ -2966,19 +2956,39 @@
           <a:lstStyle/>
           <a:p>
             <a:r>
-              <a:t>把今天做的東西全部攤開——全部圍繞同一主題：「為什麼是雲林？」</a:t>
+              <a:t>揭曉老師事先用「為什麼是雲林？」這題跑完整套流程的成品：</a:t>
+            </a:r>
+          </a:p>
+          <a:p>
+            <a:r>
+              <a:t>- 互動時間軸（HTML）：用 Claude Code 做的，可以放進學習歷程「自主學習」</a:t>
+            </a:r>
+          </a:p>
+          <a:p>
+            <a:r>
+              <a:t>- 小論文 Word：Step 3+4 定稿</a:t>
+            </a:r>
+          </a:p>
+          <a:p>
+            <a:r>
+              <a:t>- Gamma 簡報：Step 5 路徑 A，視覺強</a:t>
+            </a:r>
+          </a:p>
+          <a:p>
+            <a:r>
+              <a:t>- Claude 簡報：Step 5 路徑 B，可對照兩種風格</a:t>
             </a:r>
           </a:p>
           <a:p/>
           <a:p>
             <a:r>
-              <a:t>三小時前學生還在煩惱學習歷程怎麼寫，現在手上有 Word + 簡報，可能還有互動網頁。</a:t>
+              <a:t>教學策略選擇：可以開場就揭露當動機；或保留到結尾再揭露當對照。</a:t>
             </a:r>
           </a:p>
           <a:p/>
           <a:p>
             <a:r>
-              <a:t>這就是 Lv.3 的成果——三小時用 AI 做出別人三週才做得出的成品。</a:t>
+              <a:t>學生可從工作坊網頁下載這四份示範檔案參考。</a:t>
             </a:r>
           </a:p>
         </p:txBody>
@@ -3048,39 +3058,34 @@
           <a:lstStyle/>
           <a:p>
             <a:r>
-              <a:t>揭曉老師事先用「為什麼是雲林？」這題跑完整套流程的成品：</a:t>
-            </a:r>
-          </a:p>
-          <a:p>
-            <a:r>
-              <a:t>- 互動時間軸（HTML）：用 Claude Code 做的，可以放進學習歷程「自主學習」</a:t>
-            </a:r>
-          </a:p>
-          <a:p>
-            <a:r>
-              <a:t>- 小論文 Word：Step 3+4 定稿</a:t>
-            </a:r>
-          </a:p>
-          <a:p>
-            <a:r>
-              <a:t>- Gamma 簡報：Step 5 路徑 A，視覺強</a:t>
-            </a:r>
-          </a:p>
-          <a:p>
-            <a:r>
-              <a:t>- Claude 簡報：Step 5 路徑 B，可對照兩種風格</a:t>
+              <a:t>收尾的三個觀念：</a:t>
             </a:r>
           </a:p>
           <a:p/>
           <a:p>
             <a:r>
-              <a:t>教學策略選擇：可以開場就揭露當動機；或保留到結尾再揭露當對照。</a:t>
+              <a:t>1. AI 幫你加速，不是幫你代寫——掛名的是你（責任感）</a:t>
+            </a:r>
+          </a:p>
+          <a:p>
+            <a:r>
+              <a:t>2. 好 prompt 比好工具重要——你給 AI 多少「你的樣子」（駕馭能力）</a:t>
+            </a:r>
+          </a:p>
+          <a:p>
+            <a:r>
+              <a:t>3. 一定要自己檢查——四個 AI 可能給你四個版本的歷史（批判思考）</a:t>
             </a:r>
           </a:p>
           <a:p/>
           <a:p>
             <a:r>
-              <a:t>學生可從工作坊網頁下載這四份示範檔案參考。</a:t>
+              <a:t>下一步：今天教的是 Lv.1→Lv.3，Lv.4 正在發生（2026 起）。</a:t>
+            </a:r>
+          </a:p>
+          <a:p>
+            <a:r>
+              <a:t>回家作業（給有興趣的人）：去看一下 Anthropic Skills、ChatGPT Custom GPT，挑一個試試看。</a:t>
             </a:r>
           </a:p>
         </p:txBody>
@@ -3106,103 +3111,6 @@
 </file>
 
 <file path=ppt/notesSlides/notesSlide37.xml><?xml version="1.0" encoding="utf-8"?>
-<p:notes xmlns:a="http://schemas.openxmlformats.org/drawingml/2006/main" xmlns:p="http://schemas.openxmlformats.org/presentationml/2006/main" xmlns:r="http://schemas.openxmlformats.org/officeDocument/2006/relationships">
-  <p:cSld>
-    <p:spTree>
-      <p:nvGrpSpPr>
-        <p:cNvPr id="1" name=""/>
-        <p:cNvGrpSpPr/>
-        <p:nvPr/>
-      </p:nvGrpSpPr>
-      <p:grpSpPr>
-        <a:xfrm>
-          <a:off x="0" y="0"/>
-          <a:ext cx="0" cy="0"/>
-          <a:chOff x="0" y="0"/>
-          <a:chExt cx="0" cy="0"/>
-        </a:xfrm>
-      </p:grpSpPr>
-      <p:sp>
-        <p:nvSpPr>
-          <p:cNvPr id="2" name="Slide Image Placeholder 1"/>
-          <p:cNvSpPr>
-            <a:spLocks noGrp="1"/>
-          </p:cNvSpPr>
-          <p:nvPr>
-            <p:ph type="sldImg" idx="2"/>
-          </p:nvPr>
-        </p:nvSpPr>
-        <p:spPr/>
-      </p:sp>
-      <p:sp>
-        <p:nvSpPr>
-          <p:cNvPr id="3" name="Notes Placeholder 2"/>
-          <p:cNvSpPr>
-            <a:spLocks noGrp="1"/>
-          </p:cNvSpPr>
-          <p:nvPr>
-            <p:ph type="body" idx="3" sz="quarter"/>
-          </p:nvPr>
-        </p:nvSpPr>
-        <p:spPr/>
-        <p:txBody>
-          <a:bodyPr/>
-          <a:lstStyle/>
-          <a:p>
-            <a:r>
-              <a:t>收尾的三個觀念：</a:t>
-            </a:r>
-          </a:p>
-          <a:p/>
-          <a:p>
-            <a:r>
-              <a:t>1. AI 幫你加速，不是幫你代寫——掛名的是你（責任感）</a:t>
-            </a:r>
-          </a:p>
-          <a:p>
-            <a:r>
-              <a:t>2. 好 prompt 比好工具重要——你給 AI 多少「你的樣子」（駕馭能力）</a:t>
-            </a:r>
-          </a:p>
-          <a:p>
-            <a:r>
-              <a:t>3. 一定要自己檢查——四個 AI 可能給你四個版本的歷史（批判思考）</a:t>
-            </a:r>
-          </a:p>
-          <a:p/>
-          <a:p>
-            <a:r>
-              <a:t>下一步：今天教的是 Lv.1→Lv.3，Lv.4 正在發生（2026 起）。</a:t>
-            </a:r>
-          </a:p>
-          <a:p>
-            <a:r>
-              <a:t>回家作業（給有興趣的人）：去看一下 Anthropic Skills、ChatGPT Custom GPT，挑一個試試看。</a:t>
-            </a:r>
-          </a:p>
-        </p:txBody>
-      </p:sp>
-      <p:sp>
-        <p:nvSpPr>
-          <p:cNvPr id="4" name="Slide Number Placeholder 3"/>
-          <p:cNvSpPr>
-            <a:spLocks noGrp="1"/>
-          </p:cNvSpPr>
-          <p:nvPr>
-            <p:ph type="sldNum" idx="5" sz="quarter"/>
-          </p:nvPr>
-        </p:nvSpPr>
-        <p:spPr/>
-      </p:sp>
-    </p:spTree>
-  </p:cSld>
-  <p:clrMapOvr>
-    <a:masterClrMapping/>
-  </p:clrMapOvr>
-</p:notes>
-</file>
-
-<file path=ppt/notesSlides/notesSlide38.xml><?xml version="1.0" encoding="utf-8"?>
 <p:notes xmlns:a="http://schemas.openxmlformats.org/drawingml/2006/main" xmlns:p="http://schemas.openxmlformats.org/presentationml/2006/main" xmlns:r="http://schemas.openxmlformats.org/officeDocument/2006/relationships">
   <p:cSld>
     <p:spTree>
@@ -19935,7 +19843,7 @@
               </a:defRPr>
             </a:pPr>
             <a:r>
-              <a:t>AI 怎麼被訓練出來的？</a:t>
+              <a:t>幻覺——AI 也會騙你</a:t>
             </a:r>
           </a:p>
         </p:txBody>
@@ -19955,7 +19863,7 @@
             <a:avLst/>
           </a:prstGeom>
           <a:solidFill>
-            <a:srgbClr val="CC66FF"/>
+            <a:srgbClr val="FF6B6B"/>
           </a:solidFill>
           <a:ln>
             <a:noFill/>
@@ -19985,14 +19893,53 @@
       </p:sp>
       <p:sp>
         <p:nvSpPr>
-          <p:cNvPr id="4" name="Rectangle 3"/>
+          <p:cNvPr id="4" name="TextBox 3"/>
+          <p:cNvSpPr txBox="1"/>
+          <p:nvPr/>
+        </p:nvSpPr>
+        <p:spPr>
+          <a:xfrm>
+            <a:off x="731520" y="1691640"/>
+            <a:ext cx="10515600" cy="457200"/>
+          </a:xfrm>
+          <a:prstGeom prst="rect">
+            <a:avLst/>
+          </a:prstGeom>
+          <a:noFill/>
+        </p:spPr>
+        <p:txBody>
+          <a:bodyPr wrap="square" lIns="0" rIns="0" tIns="0" bIns="0">
+            <a:spAutoFit/>
+          </a:bodyPr>
+          <a:lstStyle/>
+          <a:p>
+            <a:pPr algn="l">
+              <a:lnSpc>
+                <a:spcPct val="140000"/>
+              </a:lnSpc>
+              <a:defRPr sz="2200" b="1">
+                <a:solidFill>
+                  <a:srgbClr val="FFFFFF"/>
+                </a:solidFill>
+                <a:latin typeface="Helvetica Neue"/>
+              </a:defRPr>
+            </a:pPr>
+            <a:r>
+              <a:t>AI 有時候會一本正經地「編故事」，這叫幻覺</a:t>
+            </a:r>
+          </a:p>
+        </p:txBody>
+      </p:sp>
+      <p:sp>
+        <p:nvSpPr>
+          <p:cNvPr id="5" name="Rectangle 4"/>
           <p:cNvSpPr/>
           <p:nvPr/>
         </p:nvSpPr>
         <p:spPr>
           <a:xfrm>
-            <a:off x="731520" y="2103120"/>
-            <a:ext cx="3383280" cy="3840480"/>
+            <a:off x="731520" y="2468880"/>
+            <a:ext cx="10515600" cy="1828800"/>
           </a:xfrm>
           <a:prstGeom prst="rect">
             <a:avLst/>
@@ -20028,20 +19975,20 @@
       </p:sp>
       <p:sp>
         <p:nvSpPr>
-          <p:cNvPr id="5" name="Rectangle 4"/>
+          <p:cNvPr id="6" name="Rectangle 5"/>
           <p:cNvSpPr/>
           <p:nvPr/>
         </p:nvSpPr>
         <p:spPr>
           <a:xfrm>
-            <a:off x="731520" y="2103120"/>
-            <a:ext cx="3383280" cy="50800"/>
+            <a:off x="731520" y="2468880"/>
+            <a:ext cx="63500" cy="1828800"/>
           </a:xfrm>
           <a:prstGeom prst="rect">
             <a:avLst/>
           </a:prstGeom>
           <a:solidFill>
-            <a:srgbClr val="00D2FF"/>
+            <a:srgbClr val="FFAA33"/>
           </a:solidFill>
           <a:ln>
             <a:noFill/>
@@ -20071,14 +20018,14 @@
       </p:sp>
       <p:sp>
         <p:nvSpPr>
-          <p:cNvPr id="6" name="TextBox 5"/>
+          <p:cNvPr id="7" name="TextBox 6"/>
           <p:cNvSpPr txBox="1"/>
           <p:nvPr/>
         </p:nvSpPr>
         <p:spPr>
           <a:xfrm>
-            <a:off x="731520" y="2468880"/>
-            <a:ext cx="3383280" cy="1097280"/>
+            <a:off x="914400" y="2560320"/>
+            <a:ext cx="10149840" cy="365760"/>
           </a:xfrm>
           <a:prstGeom prst="rect">
             <a:avLst/>
@@ -20091,33 +20038,33 @@
           </a:bodyPr>
           <a:lstStyle/>
           <a:p>
-            <a:pPr algn="ctr">
+            <a:pPr algn="l">
               <a:lnSpc>
                 <a:spcPct val="140000"/>
               </a:lnSpc>
-              <a:defRPr sz="5600" b="1">
-                <a:solidFill>
-                  <a:srgbClr val="00D2FF"/>
+              <a:defRPr sz="1400" b="1">
+                <a:solidFill>
+                  <a:srgbClr val="FFAA33"/>
                 </a:solidFill>
                 <a:latin typeface="Helvetica Neue"/>
               </a:defRPr>
             </a:pPr>
             <a:r>
-              <a:t>1</a:t>
-            </a:r>
-          </a:p>
-        </p:txBody>
-      </p:sp>
-      <p:sp>
-        <p:nvSpPr>
-          <p:cNvPr id="7" name="TextBox 6"/>
+              <a:t>❓  為什麼會有幻覺？</a:t>
+            </a:r>
+          </a:p>
+        </p:txBody>
+      </p:sp>
+      <p:sp>
+        <p:nvSpPr>
+          <p:cNvPr id="8" name="TextBox 7"/>
           <p:cNvSpPr txBox="1"/>
           <p:nvPr/>
         </p:nvSpPr>
         <p:spPr>
           <a:xfrm>
-            <a:off x="731520" y="3931920"/>
-            <a:ext cx="3383280" cy="548640"/>
+            <a:off x="914400" y="2971800"/>
+            <a:ext cx="10149840" cy="1280160"/>
           </a:xfrm>
           <a:prstGeom prst="rect">
             <a:avLst/>
@@ -20130,11 +20077,11 @@
           </a:bodyPr>
           <a:lstStyle/>
           <a:p>
-            <a:pPr algn="ctr">
+            <a:pPr algn="l">
               <a:lnSpc>
                 <a:spcPct val="140000"/>
               </a:lnSpc>
-              <a:defRPr sz="2400" b="1">
+              <a:defRPr sz="1500" b="0">
                 <a:solidFill>
                   <a:srgbClr val="FFFFFF"/>
                 </a:solidFill>
@@ -20142,50 +20089,7 @@
               </a:defRPr>
             </a:pPr>
             <a:r>
-              <a:t>預訓練</a:t>
-            </a:r>
-          </a:p>
-        </p:txBody>
-      </p:sp>
-      <p:sp>
-        <p:nvSpPr>
-          <p:cNvPr id="8" name="TextBox 7"/>
-          <p:cNvSpPr txBox="1"/>
-          <p:nvPr/>
-        </p:nvSpPr>
-        <p:spPr>
-          <a:xfrm>
-            <a:off x="731520" y="4663440"/>
-            <a:ext cx="3383280" cy="1097280"/>
-          </a:xfrm>
-          <a:prstGeom prst="rect">
-            <a:avLst/>
-          </a:prstGeom>
-          <a:noFill/>
-        </p:spPr>
-        <p:txBody>
-          <a:bodyPr wrap="square" lIns="0" rIns="0" tIns="0" bIns="0">
-            <a:spAutoFit/>
-          </a:bodyPr>
-          <a:lstStyle/>
-          <a:p>
-            <a:pPr algn="ctr">
-              <a:lnSpc>
-                <a:spcPct val="150000"/>
-              </a:lnSpc>
-              <a:defRPr sz="1500" b="0">
-                <a:solidFill>
-                  <a:srgbClr val="BBBBCC"/>
-                </a:solidFill>
-                <a:latin typeface="Helvetica Neue"/>
-              </a:defRPr>
-            </a:pPr>
-            <a:r>
-              <a:t>讀了整個網路的文字</a:t>
-            </a:r>
-            <a:br/>
-            <a:r>
-              <a:t>→ 學會語言模式</a:t>
+              <a:t>還記得剛才的「輪盤」嗎？AI 不是在「回憶事實」，是在「猜下一個最可能的字」——它沒辦法分辨「真的」跟「聽起來像真的」</a:t>
             </a:r>
           </a:p>
         </p:txBody>
@@ -20198,8 +20102,8 @@
         </p:nvSpPr>
         <p:spPr>
           <a:xfrm>
-            <a:off x="4389120" y="2103120"/>
-            <a:ext cx="3383280" cy="3840480"/>
+            <a:off x="731520" y="4572000"/>
+            <a:ext cx="10515600" cy="1828800"/>
           </a:xfrm>
           <a:prstGeom prst="rect">
             <a:avLst/>
@@ -20241,14 +20145,14 @@
         </p:nvSpPr>
         <p:spPr>
           <a:xfrm>
-            <a:off x="4389120" y="2103120"/>
-            <a:ext cx="3383280" cy="50800"/>
+            <a:off x="731520" y="4572000"/>
+            <a:ext cx="63500" cy="1828800"/>
           </a:xfrm>
           <a:prstGeom prst="rect">
             <a:avLst/>
           </a:prstGeom>
           <a:solidFill>
-            <a:srgbClr val="FFAA33"/>
+            <a:srgbClr val="FF6B6B"/>
           </a:solidFill>
           <a:ln>
             <a:noFill/>
@@ -20284,8 +20188,8 @@
         </p:nvSpPr>
         <p:spPr>
           <a:xfrm>
-            <a:off x="4389120" y="2468880"/>
-            <a:ext cx="3383280" cy="1097280"/>
+            <a:off x="914400" y="4663440"/>
+            <a:ext cx="10149840" cy="365760"/>
           </a:xfrm>
           <a:prstGeom prst="rect">
             <a:avLst/>
@@ -20298,19 +20202,19 @@
           </a:bodyPr>
           <a:lstStyle/>
           <a:p>
-            <a:pPr algn="ctr">
+            <a:pPr algn="l">
               <a:lnSpc>
                 <a:spcPct val="140000"/>
               </a:lnSpc>
-              <a:defRPr sz="5600" b="1">
-                <a:solidFill>
-                  <a:srgbClr val="FFAA33"/>
+              <a:defRPr sz="1400" b="1">
+                <a:solidFill>
+                  <a:srgbClr val="FF6B6B"/>
                 </a:solidFill>
                 <a:latin typeface="Helvetica Neue"/>
               </a:defRPr>
             </a:pPr>
             <a:r>
-              <a:t>2</a:t>
+              <a:t>實驗：用同一個問題測四個 AI</a:t>
             </a:r>
           </a:p>
         </p:txBody>
@@ -20323,8 +20227,8 @@
         </p:nvSpPr>
         <p:spPr>
           <a:xfrm>
-            <a:off x="4389120" y="3931920"/>
-            <a:ext cx="3383280" cy="548640"/>
+            <a:off x="914400" y="5074920"/>
+            <a:ext cx="10149840" cy="1280160"/>
           </a:xfrm>
           <a:prstGeom prst="rect">
             <a:avLst/>
@@ -20337,11 +20241,11 @@
           </a:bodyPr>
           <a:lstStyle/>
           <a:p>
-            <a:pPr algn="ctr">
+            <a:pPr algn="l">
               <a:lnSpc>
                 <a:spcPct val="140000"/>
               </a:lnSpc>
-              <a:defRPr sz="2400" b="1">
+              <a:defRPr sz="1500" b="0">
                 <a:solidFill>
                   <a:srgbClr val="FFFFFF"/>
                 </a:solidFill>
@@ -20349,257 +20253,11 @@
               </a:defRPr>
             </a:pPr>
             <a:r>
-              <a:t>微調</a:t>
-            </a:r>
-          </a:p>
-        </p:txBody>
-      </p:sp>
-      <p:sp>
-        <p:nvSpPr>
-          <p:cNvPr id="13" name="TextBox 12"/>
-          <p:cNvSpPr txBox="1"/>
-          <p:nvPr/>
-        </p:nvSpPr>
-        <p:spPr>
-          <a:xfrm>
-            <a:off x="4389120" y="4663440"/>
-            <a:ext cx="3383280" cy="1097280"/>
-          </a:xfrm>
-          <a:prstGeom prst="rect">
-            <a:avLst/>
-          </a:prstGeom>
-          <a:noFill/>
-        </p:spPr>
-        <p:txBody>
-          <a:bodyPr wrap="square" lIns="0" rIns="0" tIns="0" bIns="0">
-            <a:spAutoFit/>
-          </a:bodyPr>
-          <a:lstStyle/>
-          <a:p>
-            <a:pPr algn="ctr">
-              <a:lnSpc>
-                <a:spcPct val="150000"/>
-              </a:lnSpc>
-              <a:defRPr sz="1500" b="0">
-                <a:solidFill>
-                  <a:srgbClr val="BBBBCC"/>
-                </a:solidFill>
-                <a:latin typeface="Helvetica Neue"/>
-              </a:defRPr>
-            </a:pPr>
-            <a:r>
-              <a:t>針對任務練習</a:t>
+              <a:t>分別打開 ChatGPT、Claude、Gemini、Grok，貼上完全相同的問題：</a:t>
             </a:r>
             <a:br/>
             <a:r>
-              <a:t>→ 學會當助理</a:t>
-            </a:r>
-          </a:p>
-        </p:txBody>
-      </p:sp>
-      <p:sp>
-        <p:nvSpPr>
-          <p:cNvPr id="14" name="Rectangle 13"/>
-          <p:cNvSpPr/>
-          <p:nvPr/>
-        </p:nvSpPr>
-        <p:spPr>
-          <a:xfrm>
-            <a:off x="8046720" y="2103120"/>
-            <a:ext cx="3383280" cy="3840480"/>
-          </a:xfrm>
-          <a:prstGeom prst="rect">
-            <a:avLst/>
-          </a:prstGeom>
-          <a:solidFill>
-            <a:srgbClr val="222B45"/>
-          </a:solidFill>
-          <a:ln>
-            <a:noFill/>
-          </a:ln>
-        </p:spPr>
-        <p:style>
-          <a:lnRef idx="1">
-            <a:schemeClr val="accent1"/>
-          </a:lnRef>
-          <a:fillRef idx="3">
-            <a:schemeClr val="accent1"/>
-          </a:fillRef>
-          <a:effectRef idx="2">
-            <a:schemeClr val="accent1"/>
-          </a:effectRef>
-          <a:fontRef idx="minor">
-            <a:schemeClr val="lt1"/>
-          </a:fontRef>
-        </p:style>
-        <p:txBody>
-          <a:bodyPr rtlCol="0" anchor="ctr"/>
-          <a:lstStyle/>
-          <a:p>
-            <a:pPr algn="ctr"/>
-          </a:p>
-        </p:txBody>
-      </p:sp>
-      <p:sp>
-        <p:nvSpPr>
-          <p:cNvPr id="15" name="Rectangle 14"/>
-          <p:cNvSpPr/>
-          <p:nvPr/>
-        </p:nvSpPr>
-        <p:spPr>
-          <a:xfrm>
-            <a:off x="8046720" y="2103120"/>
-            <a:ext cx="3383280" cy="50800"/>
-          </a:xfrm>
-          <a:prstGeom prst="rect">
-            <a:avLst/>
-          </a:prstGeom>
-          <a:solidFill>
-            <a:srgbClr val="4ECB71"/>
-          </a:solidFill>
-          <a:ln>
-            <a:noFill/>
-          </a:ln>
-        </p:spPr>
-        <p:style>
-          <a:lnRef idx="1">
-            <a:schemeClr val="accent1"/>
-          </a:lnRef>
-          <a:fillRef idx="3">
-            <a:schemeClr val="accent1"/>
-          </a:fillRef>
-          <a:effectRef idx="2">
-            <a:schemeClr val="accent1"/>
-          </a:effectRef>
-          <a:fontRef idx="minor">
-            <a:schemeClr val="lt1"/>
-          </a:fontRef>
-        </p:style>
-        <p:txBody>
-          <a:bodyPr rtlCol="0" anchor="ctr"/>
-          <a:lstStyle/>
-          <a:p>
-            <a:pPr algn="ctr"/>
-          </a:p>
-        </p:txBody>
-      </p:sp>
-      <p:sp>
-        <p:nvSpPr>
-          <p:cNvPr id="16" name="TextBox 15"/>
-          <p:cNvSpPr txBox="1"/>
-          <p:nvPr/>
-        </p:nvSpPr>
-        <p:spPr>
-          <a:xfrm>
-            <a:off x="8046720" y="2468880"/>
-            <a:ext cx="3383280" cy="1097280"/>
-          </a:xfrm>
-          <a:prstGeom prst="rect">
-            <a:avLst/>
-          </a:prstGeom>
-          <a:noFill/>
-        </p:spPr>
-        <p:txBody>
-          <a:bodyPr wrap="square" lIns="0" rIns="0" tIns="0" bIns="0">
-            <a:spAutoFit/>
-          </a:bodyPr>
-          <a:lstStyle/>
-          <a:p>
-            <a:pPr algn="ctr">
-              <a:lnSpc>
-                <a:spcPct val="140000"/>
-              </a:lnSpc>
-              <a:defRPr sz="5600" b="1">
-                <a:solidFill>
-                  <a:srgbClr val="4ECB71"/>
-                </a:solidFill>
-                <a:latin typeface="Helvetica Neue"/>
-              </a:defRPr>
-            </a:pPr>
-            <a:r>
-              <a:t>3</a:t>
-            </a:r>
-          </a:p>
-        </p:txBody>
-      </p:sp>
-      <p:sp>
-        <p:nvSpPr>
-          <p:cNvPr id="17" name="TextBox 16"/>
-          <p:cNvSpPr txBox="1"/>
-          <p:nvPr/>
-        </p:nvSpPr>
-        <p:spPr>
-          <a:xfrm>
-            <a:off x="8046720" y="3931920"/>
-            <a:ext cx="3383280" cy="548640"/>
-          </a:xfrm>
-          <a:prstGeom prst="rect">
-            <a:avLst/>
-          </a:prstGeom>
-          <a:noFill/>
-        </p:spPr>
-        <p:txBody>
-          <a:bodyPr wrap="square" lIns="0" rIns="0" tIns="0" bIns="0">
-            <a:spAutoFit/>
-          </a:bodyPr>
-          <a:lstStyle/>
-          <a:p>
-            <a:pPr algn="ctr">
-              <a:lnSpc>
-                <a:spcPct val="140000"/>
-              </a:lnSpc>
-              <a:defRPr sz="2400" b="1">
-                <a:solidFill>
-                  <a:srgbClr val="FFFFFF"/>
-                </a:solidFill>
-                <a:latin typeface="Helvetica Neue"/>
-              </a:defRPr>
-            </a:pPr>
-            <a:r>
-              <a:t>RLHF</a:t>
-            </a:r>
-          </a:p>
-        </p:txBody>
-      </p:sp>
-      <p:sp>
-        <p:nvSpPr>
-          <p:cNvPr id="18" name="TextBox 17"/>
-          <p:cNvSpPr txBox="1"/>
-          <p:nvPr/>
-        </p:nvSpPr>
-        <p:spPr>
-          <a:xfrm>
-            <a:off x="8046720" y="4663440"/>
-            <a:ext cx="3383280" cy="1097280"/>
-          </a:xfrm>
-          <a:prstGeom prst="rect">
-            <a:avLst/>
-          </a:prstGeom>
-          <a:noFill/>
-        </p:spPr>
-        <p:txBody>
-          <a:bodyPr wrap="square" lIns="0" rIns="0" tIns="0" bIns="0">
-            <a:spAutoFit/>
-          </a:bodyPr>
-          <a:lstStyle/>
-          <a:p>
-            <a:pPr algn="ctr">
-              <a:lnSpc>
-                <a:spcPct val="150000"/>
-              </a:lnSpc>
-              <a:defRPr sz="1500" b="0">
-                <a:solidFill>
-                  <a:srgbClr val="BBBBCC"/>
-                </a:solidFill>
-                <a:latin typeface="Helvetica Neue"/>
-              </a:defRPr>
-            </a:pPr>
-            <a:r>
-              <a:t>人類回饋好壞</a:t>
-            </a:r>
-            <a:br/>
-            <a:r>
-              <a:t>→ 學會避免有害回應</a:t>
+              <a:t>「請描述 1920 年雲林農民組合抗議虎尾糖廠壓低甘蔗收購價格的經過」</a:t>
             </a:r>
           </a:p>
         </p:txBody>
@@ -20664,7 +20322,7 @@
               </a:defRPr>
             </a:pPr>
             <a:r>
-              <a:t>幻覺——AI 也會騙你</a:t>
+              <a:t>觀察重點</a:t>
             </a:r>
           </a:p>
         </p:txBody>
@@ -20720,8 +20378,8 @@
         </p:nvSpPr>
         <p:spPr>
           <a:xfrm>
-            <a:off x="731520" y="1691640"/>
-            <a:ext cx="10515600" cy="457200"/>
+            <a:off x="731520" y="1783080"/>
+            <a:ext cx="10515600" cy="2286000"/>
           </a:xfrm>
           <a:prstGeom prst="rect">
             <a:avLst/>
@@ -20729,24 +20387,92 @@
           <a:noFill/>
         </p:spPr>
         <p:txBody>
-          <a:bodyPr wrap="square" lIns="0" rIns="0" tIns="0" bIns="0">
+          <a:bodyPr wrap="square" lIns="0" rIns="0">
             <a:spAutoFit/>
           </a:bodyPr>
           <a:lstStyle/>
           <a:p>
-            <a:pPr algn="l">
+            <a:pPr>
               <a:lnSpc>
-                <a:spcPct val="140000"/>
+                <a:spcPct val="160000"/>
               </a:lnSpc>
-              <a:defRPr sz="2200" b="1">
-                <a:solidFill>
-                  <a:srgbClr val="FFFFFF"/>
+              <a:spcAft>
+                <a:spcPts val="800"/>
+              </a:spcAft>
+            </a:pPr>
+            <a:r>
+              <a:rPr sz="2000" b="1">
+                <a:solidFill>
+                  <a:srgbClr val="FF6B6B"/>
                 </a:solidFill>
                 <a:latin typeface="Helvetica Neue"/>
-              </a:defRPr>
-            </a:pPr>
-            <a:r>
-              <a:t>AI 有時候會一本正經地「編故事」，這叫幻覺</a:t>
+              </a:rPr>
+              <a:t>▸  </a:t>
+            </a:r>
+            <a:r>
+              <a:rPr sz="2000">
+                <a:solidFill>
+                  <a:srgbClr val="BBBBCC"/>
+                </a:solidFill>
+                <a:latin typeface="Helvetica Neue"/>
+              </a:rPr>
+              <a:t>四個 AI 講的是同一件事嗎？</a:t>
+            </a:r>
+          </a:p>
+          <a:p>
+            <a:pPr>
+              <a:lnSpc>
+                <a:spcPct val="160000"/>
+              </a:lnSpc>
+              <a:spcAft>
+                <a:spcPts val="800"/>
+              </a:spcAft>
+            </a:pPr>
+            <a:r>
+              <a:rPr sz="2000" b="1">
+                <a:solidFill>
+                  <a:srgbClr val="FF6B6B"/>
+                </a:solidFill>
+                <a:latin typeface="Helvetica Neue"/>
+              </a:rPr>
+              <a:t>▸  </a:t>
+            </a:r>
+            <a:r>
+              <a:rPr sz="2000">
+                <a:solidFill>
+                  <a:srgbClr val="BBBBCC"/>
+                </a:solidFill>
+                <a:latin typeface="Helvetica Neue"/>
+              </a:rPr>
+              <a:t>有沒有 AI 承認「我不確定」？</a:t>
+            </a:r>
+          </a:p>
+          <a:p>
+            <a:pPr>
+              <a:lnSpc>
+                <a:spcPct val="160000"/>
+              </a:lnSpc>
+              <a:spcAft>
+                <a:spcPts val="800"/>
+              </a:spcAft>
+            </a:pPr>
+            <a:r>
+              <a:rPr sz="2000" b="1">
+                <a:solidFill>
+                  <a:srgbClr val="FF6B6B"/>
+                </a:solidFill>
+                <a:latin typeface="Helvetica Neue"/>
+              </a:rPr>
+              <a:t>▸  </a:t>
+            </a:r>
+            <a:r>
+              <a:rPr sz="2000">
+                <a:solidFill>
+                  <a:srgbClr val="BBBBCC"/>
+                </a:solidFill>
+                <a:latin typeface="Helvetica Neue"/>
+              </a:rPr>
+              <a:t>跟 NotebookLM 的素材比對——哪些是真的？哪些是編的？</a:t>
             </a:r>
           </a:p>
         </p:txBody>
@@ -20759,7 +20485,7 @@
         </p:nvSpPr>
         <p:spPr>
           <a:xfrm>
-            <a:off x="731520" y="2468880"/>
+            <a:off x="731520" y="4297680"/>
             <a:ext cx="10515600" cy="1828800"/>
           </a:xfrm>
           <a:prstGeom prst="rect">
@@ -20802,14 +20528,14 @@
         </p:nvSpPr>
         <p:spPr>
           <a:xfrm>
-            <a:off x="731520" y="2468880"/>
+            <a:off x="731520" y="4297680"/>
             <a:ext cx="63500" cy="1828800"/>
           </a:xfrm>
           <a:prstGeom prst="rect">
             <a:avLst/>
           </a:prstGeom>
           <a:solidFill>
-            <a:srgbClr val="FFAA33"/>
+            <a:srgbClr val="4ECB71"/>
           </a:solidFill>
           <a:ln>
             <a:noFill/>
@@ -20845,7 +20571,7 @@
         </p:nvSpPr>
         <p:spPr>
           <a:xfrm>
-            <a:off x="914400" y="2560320"/>
+            <a:off x="914400" y="4389120"/>
             <a:ext cx="10149840" cy="365760"/>
           </a:xfrm>
           <a:prstGeom prst="rect">
@@ -20865,13 +20591,13 @@
               </a:lnSpc>
               <a:defRPr sz="1400" b="1">
                 <a:solidFill>
-                  <a:srgbClr val="FFAA33"/>
+                  <a:srgbClr val="4ECB71"/>
                 </a:solidFill>
                 <a:latin typeface="Helvetica Neue"/>
               </a:defRPr>
             </a:pPr>
             <a:r>
-              <a:t>❓  為什麼會有幻覺？</a:t>
+              <a:t>結論</a:t>
             </a:r>
           </a:p>
         </p:txBody>
@@ -20884,7 +20610,7 @@
         </p:nvSpPr>
         <p:spPr>
           <a:xfrm>
-            <a:off x="914400" y="2971800"/>
+            <a:off x="914400" y="4800600"/>
             <a:ext cx="10149840" cy="1280160"/>
           </a:xfrm>
           <a:prstGeom prst="rect">
@@ -20902,7 +20628,7 @@
               <a:lnSpc>
                 <a:spcPct val="140000"/>
               </a:lnSpc>
-              <a:defRPr sz="1500" b="0">
+              <a:defRPr sz="2000" b="0">
                 <a:solidFill>
                   <a:srgbClr val="FFFFFF"/>
                 </a:solidFill>
@@ -20910,175 +20636,11 @@
               </a:defRPr>
             </a:pPr>
             <a:r>
-              <a:t>還記得剛才的「輪盤」嗎？AI 不是在「回憶事實」，是在「猜下一個最可能的字」——它沒辦法分辨「真的」跟「聽起來像真的」</a:t>
-            </a:r>
-          </a:p>
-        </p:txBody>
-      </p:sp>
-      <p:sp>
-        <p:nvSpPr>
-          <p:cNvPr id="9" name="Rectangle 8"/>
-          <p:cNvSpPr/>
-          <p:nvPr/>
-        </p:nvSpPr>
-        <p:spPr>
-          <a:xfrm>
-            <a:off x="731520" y="4572000"/>
-            <a:ext cx="10515600" cy="1828800"/>
-          </a:xfrm>
-          <a:prstGeom prst="rect">
-            <a:avLst/>
-          </a:prstGeom>
-          <a:solidFill>
-            <a:srgbClr val="222B45"/>
-          </a:solidFill>
-          <a:ln>
-            <a:noFill/>
-          </a:ln>
-        </p:spPr>
-        <p:style>
-          <a:lnRef idx="1">
-            <a:schemeClr val="accent1"/>
-          </a:lnRef>
-          <a:fillRef idx="3">
-            <a:schemeClr val="accent1"/>
-          </a:fillRef>
-          <a:effectRef idx="2">
-            <a:schemeClr val="accent1"/>
-          </a:effectRef>
-          <a:fontRef idx="minor">
-            <a:schemeClr val="lt1"/>
-          </a:fontRef>
-        </p:style>
-        <p:txBody>
-          <a:bodyPr rtlCol="0" anchor="ctr"/>
-          <a:lstStyle/>
-          <a:p>
-            <a:pPr algn="ctr"/>
-          </a:p>
-        </p:txBody>
-      </p:sp>
-      <p:sp>
-        <p:nvSpPr>
-          <p:cNvPr id="10" name="Rectangle 9"/>
-          <p:cNvSpPr/>
-          <p:nvPr/>
-        </p:nvSpPr>
-        <p:spPr>
-          <a:xfrm>
-            <a:off x="731520" y="4572000"/>
-            <a:ext cx="63500" cy="1828800"/>
-          </a:xfrm>
-          <a:prstGeom prst="rect">
-            <a:avLst/>
-          </a:prstGeom>
-          <a:solidFill>
-            <a:srgbClr val="FF6B6B"/>
-          </a:solidFill>
-          <a:ln>
-            <a:noFill/>
-          </a:ln>
-        </p:spPr>
-        <p:style>
-          <a:lnRef idx="1">
-            <a:schemeClr val="accent1"/>
-          </a:lnRef>
-          <a:fillRef idx="3">
-            <a:schemeClr val="accent1"/>
-          </a:fillRef>
-          <a:effectRef idx="2">
-            <a:schemeClr val="accent1"/>
-          </a:effectRef>
-          <a:fontRef idx="minor">
-            <a:schemeClr val="lt1"/>
-          </a:fontRef>
-        </p:style>
-        <p:txBody>
-          <a:bodyPr rtlCol="0" anchor="ctr"/>
-          <a:lstStyle/>
-          <a:p>
-            <a:pPr algn="ctr"/>
-          </a:p>
-        </p:txBody>
-      </p:sp>
-      <p:sp>
-        <p:nvSpPr>
-          <p:cNvPr id="11" name="TextBox 10"/>
-          <p:cNvSpPr txBox="1"/>
-          <p:nvPr/>
-        </p:nvSpPr>
-        <p:spPr>
-          <a:xfrm>
-            <a:off x="914400" y="4663440"/>
-            <a:ext cx="10149840" cy="365760"/>
-          </a:xfrm>
-          <a:prstGeom prst="rect">
-            <a:avLst/>
-          </a:prstGeom>
-          <a:noFill/>
-        </p:spPr>
-        <p:txBody>
-          <a:bodyPr wrap="square" lIns="0" rIns="0" tIns="0" bIns="0">
-            <a:spAutoFit/>
-          </a:bodyPr>
-          <a:lstStyle/>
-          <a:p>
-            <a:pPr algn="l">
-              <a:lnSpc>
-                <a:spcPct val="140000"/>
-              </a:lnSpc>
-              <a:defRPr sz="1400" b="1">
-                <a:solidFill>
-                  <a:srgbClr val="FF6B6B"/>
-                </a:solidFill>
-                <a:latin typeface="Helvetica Neue"/>
-              </a:defRPr>
-            </a:pPr>
-            <a:r>
-              <a:t>實驗：用同一個問題測四個 AI</a:t>
-            </a:r>
-          </a:p>
-        </p:txBody>
-      </p:sp>
-      <p:sp>
-        <p:nvSpPr>
-          <p:cNvPr id="12" name="TextBox 11"/>
-          <p:cNvSpPr txBox="1"/>
-          <p:nvPr/>
-        </p:nvSpPr>
-        <p:spPr>
-          <a:xfrm>
-            <a:off x="914400" y="5074920"/>
-            <a:ext cx="10149840" cy="1280160"/>
-          </a:xfrm>
-          <a:prstGeom prst="rect">
-            <a:avLst/>
-          </a:prstGeom>
-          <a:noFill/>
-        </p:spPr>
-        <p:txBody>
-          <a:bodyPr wrap="square" lIns="0" rIns="0" tIns="0" bIns="0">
-            <a:spAutoFit/>
-          </a:bodyPr>
-          <a:lstStyle/>
-          <a:p>
-            <a:pPr algn="l">
-              <a:lnSpc>
-                <a:spcPct val="140000"/>
-              </a:lnSpc>
-              <a:defRPr sz="1500" b="0">
-                <a:solidFill>
-                  <a:srgbClr val="FFFFFF"/>
-                </a:solidFill>
-                <a:latin typeface="Helvetica Neue"/>
-              </a:defRPr>
-            </a:pPr>
-            <a:r>
-              <a:t>分別打開 ChatGPT、Claude、Gemini、Grok，貼上完全相同的問題：</a:t>
+              <a:t>AI 不是知識庫，是語言模型。</a:t>
             </a:r>
             <a:br/>
             <a:r>
-              <a:t>「請描述 1920 年雲林農民組合抗議虎尾糖廠壓低甘蔗收購價格的經過」</a:t>
+              <a:t>所以才需要 NotebookLM——有出處的回答才可信。</a:t>
             </a:r>
           </a:p>
         </p:txBody>
@@ -21143,7 +20705,7 @@
               </a:defRPr>
             </a:pPr>
             <a:r>
-              <a:t>觀察重點</a:t>
+              <a:t>什麼東西不該丟給 AI？</a:t>
             </a:r>
           </a:p>
         </p:txBody>
@@ -21199,8 +20761,8 @@
         </p:nvSpPr>
         <p:spPr>
           <a:xfrm>
-            <a:off x="731520" y="1783080"/>
-            <a:ext cx="10515600" cy="2286000"/>
+            <a:off x="731520" y="1691640"/>
+            <a:ext cx="10515600" cy="457200"/>
           </a:xfrm>
           <a:prstGeom prst="rect">
             <a:avLst/>
@@ -21208,92 +20770,24 @@
           <a:noFill/>
         </p:spPr>
         <p:txBody>
-          <a:bodyPr wrap="square" lIns="0" rIns="0">
+          <a:bodyPr wrap="square" lIns="0" rIns="0" tIns="0" bIns="0">
             <a:spAutoFit/>
           </a:bodyPr>
           <a:lstStyle/>
           <a:p>
-            <a:pPr>
+            <a:pPr algn="l">
               <a:lnSpc>
-                <a:spcPct val="160000"/>
+                <a:spcPct val="140000"/>
               </a:lnSpc>
-              <a:spcAft>
-                <a:spcPts val="800"/>
-              </a:spcAft>
-            </a:pPr>
-            <a:r>
-              <a:rPr sz="2000" b="1">
-                <a:solidFill>
-                  <a:srgbClr val="FF6B6B"/>
+              <a:defRPr sz="2200" b="0">
+                <a:solidFill>
+                  <a:srgbClr val="BBBBCC"/>
                 </a:solidFill>
                 <a:latin typeface="Helvetica Neue"/>
-              </a:rPr>
-              <a:t>▸  </a:t>
-            </a:r>
-            <a:r>
-              <a:rPr sz="2000">
-                <a:solidFill>
-                  <a:srgbClr val="BBBBCC"/>
-                </a:solidFill>
-                <a:latin typeface="Helvetica Neue"/>
-              </a:rPr>
-              <a:t>四個 AI 講的是同一件事嗎？</a:t>
-            </a:r>
-          </a:p>
-          <a:p>
-            <a:pPr>
-              <a:lnSpc>
-                <a:spcPct val="160000"/>
-              </a:lnSpc>
-              <a:spcAft>
-                <a:spcPts val="800"/>
-              </a:spcAft>
-            </a:pPr>
-            <a:r>
-              <a:rPr sz="2000" b="1">
-                <a:solidFill>
-                  <a:srgbClr val="FF6B6B"/>
-                </a:solidFill>
-                <a:latin typeface="Helvetica Neue"/>
-              </a:rPr>
-              <a:t>▸  </a:t>
-            </a:r>
-            <a:r>
-              <a:rPr sz="2000">
-                <a:solidFill>
-                  <a:srgbClr val="BBBBCC"/>
-                </a:solidFill>
-                <a:latin typeface="Helvetica Neue"/>
-              </a:rPr>
-              <a:t>有沒有 AI 承認「我不確定」？</a:t>
-            </a:r>
-          </a:p>
-          <a:p>
-            <a:pPr>
-              <a:lnSpc>
-                <a:spcPct val="160000"/>
-              </a:lnSpc>
-              <a:spcAft>
-                <a:spcPts val="800"/>
-              </a:spcAft>
-            </a:pPr>
-            <a:r>
-              <a:rPr sz="2000" b="1">
-                <a:solidFill>
-                  <a:srgbClr val="FF6B6B"/>
-                </a:solidFill>
-                <a:latin typeface="Helvetica Neue"/>
-              </a:rPr>
-              <a:t>▸  </a:t>
-            </a:r>
-            <a:r>
-              <a:rPr sz="2000">
-                <a:solidFill>
-                  <a:srgbClr val="BBBBCC"/>
-                </a:solidFill>
-                <a:latin typeface="Helvetica Neue"/>
-              </a:rPr>
-              <a:t>跟 NotebookLM 的素材比對——哪些是真的？哪些是編的？</a:t>
+              </a:defRPr>
+            </a:pPr>
+            <a:r>
+              <a:t>你打進去的每一個字，都會離開你的電腦</a:t>
             </a:r>
           </a:p>
         </p:txBody>
@@ -21306,8 +20800,8 @@
         </p:nvSpPr>
         <p:spPr>
           <a:xfrm>
-            <a:off x="731520" y="4297680"/>
-            <a:ext cx="10515600" cy="1828800"/>
+            <a:off x="731520" y="2468880"/>
+            <a:ext cx="5120640" cy="3200400"/>
           </a:xfrm>
           <a:prstGeom prst="rect">
             <a:avLst/>
@@ -21349,8 +20843,182 @@
         </p:nvSpPr>
         <p:spPr>
           <a:xfrm>
-            <a:off x="731520" y="4297680"/>
-            <a:ext cx="63500" cy="1828800"/>
+            <a:off x="731520" y="2468880"/>
+            <a:ext cx="63500" cy="3200400"/>
+          </a:xfrm>
+          <a:prstGeom prst="rect">
+            <a:avLst/>
+          </a:prstGeom>
+          <a:solidFill>
+            <a:srgbClr val="FF6B6B"/>
+          </a:solidFill>
+          <a:ln>
+            <a:noFill/>
+          </a:ln>
+        </p:spPr>
+        <p:style>
+          <a:lnRef idx="1">
+            <a:schemeClr val="accent1"/>
+          </a:lnRef>
+          <a:fillRef idx="3">
+            <a:schemeClr val="accent1"/>
+          </a:fillRef>
+          <a:effectRef idx="2">
+            <a:schemeClr val="accent1"/>
+          </a:effectRef>
+          <a:fontRef idx="minor">
+            <a:schemeClr val="lt1"/>
+          </a:fontRef>
+        </p:style>
+        <p:txBody>
+          <a:bodyPr rtlCol="0" anchor="ctr"/>
+          <a:lstStyle/>
+          <a:p>
+            <a:pPr algn="ctr"/>
+          </a:p>
+        </p:txBody>
+      </p:sp>
+      <p:sp>
+        <p:nvSpPr>
+          <p:cNvPr id="7" name="TextBox 6"/>
+          <p:cNvSpPr txBox="1"/>
+          <p:nvPr/>
+        </p:nvSpPr>
+        <p:spPr>
+          <a:xfrm>
+            <a:off x="914400" y="2560320"/>
+            <a:ext cx="4754880" cy="365760"/>
+          </a:xfrm>
+          <a:prstGeom prst="rect">
+            <a:avLst/>
+          </a:prstGeom>
+          <a:noFill/>
+        </p:spPr>
+        <p:txBody>
+          <a:bodyPr wrap="square" lIns="0" rIns="0" tIns="0" bIns="0">
+            <a:spAutoFit/>
+          </a:bodyPr>
+          <a:lstStyle/>
+          <a:p>
+            <a:pPr algn="l">
+              <a:lnSpc>
+                <a:spcPct val="140000"/>
+              </a:lnSpc>
+              <a:defRPr sz="1400" b="1">
+                <a:solidFill>
+                  <a:srgbClr val="FF6B6B"/>
+                </a:solidFill>
+                <a:latin typeface="Helvetica Neue"/>
+              </a:defRPr>
+            </a:pPr>
+            <a:r>
+              <a:t>不要丟</a:t>
+            </a:r>
+          </a:p>
+        </p:txBody>
+      </p:sp>
+      <p:sp>
+        <p:nvSpPr>
+          <p:cNvPr id="8" name="TextBox 7"/>
+          <p:cNvSpPr txBox="1"/>
+          <p:nvPr/>
+        </p:nvSpPr>
+        <p:spPr>
+          <a:xfrm>
+            <a:off x="914400" y="2971800"/>
+            <a:ext cx="4754880" cy="2651760"/>
+          </a:xfrm>
+          <a:prstGeom prst="rect">
+            <a:avLst/>
+          </a:prstGeom>
+          <a:noFill/>
+        </p:spPr>
+        <p:txBody>
+          <a:bodyPr wrap="square" lIns="0" rIns="0" tIns="0" bIns="0">
+            <a:spAutoFit/>
+          </a:bodyPr>
+          <a:lstStyle/>
+          <a:p>
+            <a:pPr algn="l">
+              <a:lnSpc>
+                <a:spcPct val="140000"/>
+              </a:lnSpc>
+              <a:defRPr sz="1700" b="0">
+                <a:solidFill>
+                  <a:srgbClr val="FFFFFF"/>
+                </a:solidFill>
+                <a:latin typeface="Helvetica Neue"/>
+              </a:defRPr>
+            </a:pPr>
+            <a:r>
+              <a:t>▸  日記、心情、家裡狀況</a:t>
+            </a:r>
+            <a:br/>
+            <a:br/>
+            <a:r>
+              <a:t>▸  同學個資、輔導紀錄</a:t>
+            </a:r>
+            <a:br/>
+            <a:br/>
+            <a:r>
+              <a:t>▸  未公開的競賽作品</a:t>
+            </a:r>
+          </a:p>
+        </p:txBody>
+      </p:sp>
+      <p:sp>
+        <p:nvSpPr>
+          <p:cNvPr id="9" name="Rectangle 8"/>
+          <p:cNvSpPr/>
+          <p:nvPr/>
+        </p:nvSpPr>
+        <p:spPr>
+          <a:xfrm>
+            <a:off x="6126480" y="2468880"/>
+            <a:ext cx="5120640" cy="3200400"/>
+          </a:xfrm>
+          <a:prstGeom prst="rect">
+            <a:avLst/>
+          </a:prstGeom>
+          <a:solidFill>
+            <a:srgbClr val="222B45"/>
+          </a:solidFill>
+          <a:ln>
+            <a:noFill/>
+          </a:ln>
+        </p:spPr>
+        <p:style>
+          <a:lnRef idx="1">
+            <a:schemeClr val="accent1"/>
+          </a:lnRef>
+          <a:fillRef idx="3">
+            <a:schemeClr val="accent1"/>
+          </a:fillRef>
+          <a:effectRef idx="2">
+            <a:schemeClr val="accent1"/>
+          </a:effectRef>
+          <a:fontRef idx="minor">
+            <a:schemeClr val="lt1"/>
+          </a:fontRef>
+        </p:style>
+        <p:txBody>
+          <a:bodyPr rtlCol="0" anchor="ctr"/>
+          <a:lstStyle/>
+          <a:p>
+            <a:pPr algn="ctr"/>
+          </a:p>
+        </p:txBody>
+      </p:sp>
+      <p:sp>
+        <p:nvSpPr>
+          <p:cNvPr id="10" name="Rectangle 9"/>
+          <p:cNvSpPr/>
+          <p:nvPr/>
+        </p:nvSpPr>
+        <p:spPr>
+          <a:xfrm>
+            <a:off x="6126480" y="2468880"/>
+            <a:ext cx="63500" cy="3200400"/>
           </a:xfrm>
           <a:prstGeom prst="rect">
             <a:avLst/>
@@ -21386,14 +21054,14 @@
       </p:sp>
       <p:sp>
         <p:nvSpPr>
-          <p:cNvPr id="7" name="TextBox 6"/>
+          <p:cNvPr id="11" name="TextBox 10"/>
           <p:cNvSpPr txBox="1"/>
           <p:nvPr/>
         </p:nvSpPr>
         <p:spPr>
           <a:xfrm>
-            <a:off x="914400" y="4389120"/>
-            <a:ext cx="10149840" cy="365760"/>
+            <a:off x="6309360" y="2560320"/>
+            <a:ext cx="4754880" cy="365760"/>
           </a:xfrm>
           <a:prstGeom prst="rect">
             <a:avLst/>
@@ -21418,21 +21086,21 @@
               </a:defRPr>
             </a:pPr>
             <a:r>
-              <a:t>結論</a:t>
-            </a:r>
-          </a:p>
-        </p:txBody>
-      </p:sp>
-      <p:sp>
-        <p:nvSpPr>
-          <p:cNvPr id="8" name="TextBox 7"/>
+              <a:t>判準</a:t>
+            </a:r>
+          </a:p>
+        </p:txBody>
+      </p:sp>
+      <p:sp>
+        <p:nvSpPr>
+          <p:cNvPr id="12" name="TextBox 11"/>
           <p:cNvSpPr txBox="1"/>
           <p:nvPr/>
         </p:nvSpPr>
         <p:spPr>
           <a:xfrm>
-            <a:off x="914400" y="4800600"/>
-            <a:ext cx="10149840" cy="1280160"/>
+            <a:off x="6309360" y="2971800"/>
+            <a:ext cx="4754880" cy="2651760"/>
           </a:xfrm>
           <a:prstGeom prst="rect">
             <a:avLst/>
@@ -21449,7 +21117,7 @@
               <a:lnSpc>
                 <a:spcPct val="140000"/>
               </a:lnSpc>
-              <a:defRPr sz="2000" b="0">
+              <a:defRPr sz="1700" b="0">
                 <a:solidFill>
                   <a:srgbClr val="FFFFFF"/>
                 </a:solidFill>
@@ -21457,11 +21125,16 @@
               </a:defRPr>
             </a:pPr>
             <a:r>
-              <a:t>AI 不是知識庫，是語言模型。</a:t>
+              <a:t>「這段話被截圖貼到網路上，</a:t>
             </a:r>
             <a:br/>
             <a:r>
-              <a:t>所以才需要 NotebookLM——有出處的回答才可信。</a:t>
+              <a:t>我會崩潰嗎？」</a:t>
+            </a:r>
+            <a:br/>
+            <a:br/>
+            <a:r>
+              <a:t>會  →  別丟雲端</a:t>
             </a:r>
           </a:p>
         </p:txBody>
@@ -21526,7 +21199,7 @@
               </a:defRPr>
             </a:pPr>
             <a:r>
-              <a:t>什麼東西不該丟給 AI？</a:t>
+              <a:t>你現在手上有什麼？</a:t>
             </a:r>
           </a:p>
         </p:txBody>
@@ -21541,6 +21214,256 @@
           <a:xfrm>
             <a:off x="731520" y="1325880"/>
             <a:ext cx="10515600" cy="25400"/>
+          </a:xfrm>
+          <a:prstGeom prst="rect">
+            <a:avLst/>
+          </a:prstGeom>
+          <a:solidFill>
+            <a:srgbClr val="00D2FF"/>
+          </a:solidFill>
+          <a:ln>
+            <a:noFill/>
+          </a:ln>
+        </p:spPr>
+        <p:style>
+          <a:lnRef idx="1">
+            <a:schemeClr val="accent1"/>
+          </a:lnRef>
+          <a:fillRef idx="3">
+            <a:schemeClr val="accent1"/>
+          </a:fillRef>
+          <a:effectRef idx="2">
+            <a:schemeClr val="accent1"/>
+          </a:effectRef>
+          <a:fontRef idx="minor">
+            <a:schemeClr val="lt1"/>
+          </a:fontRef>
+        </p:style>
+        <p:txBody>
+          <a:bodyPr rtlCol="0" anchor="ctr"/>
+          <a:lstStyle/>
+          <a:p>
+            <a:pPr algn="ctr"/>
+          </a:p>
+        </p:txBody>
+      </p:sp>
+      <p:sp>
+        <p:nvSpPr>
+          <p:cNvPr id="4" name="Rectangle 3"/>
+          <p:cNvSpPr/>
+          <p:nvPr/>
+        </p:nvSpPr>
+        <p:spPr>
+          <a:xfrm>
+            <a:off x="731520" y="1783080"/>
+            <a:ext cx="10515600" cy="594360"/>
+          </a:xfrm>
+          <a:prstGeom prst="rect">
+            <a:avLst/>
+          </a:prstGeom>
+          <a:solidFill>
+            <a:srgbClr val="222B45"/>
+          </a:solidFill>
+          <a:ln>
+            <a:noFill/>
+          </a:ln>
+        </p:spPr>
+        <p:style>
+          <a:lnRef idx="1">
+            <a:schemeClr val="accent1"/>
+          </a:lnRef>
+          <a:fillRef idx="3">
+            <a:schemeClr val="accent1"/>
+          </a:fillRef>
+          <a:effectRef idx="2">
+            <a:schemeClr val="accent1"/>
+          </a:effectRef>
+          <a:fontRef idx="minor">
+            <a:schemeClr val="lt1"/>
+          </a:fontRef>
+        </p:style>
+        <p:txBody>
+          <a:bodyPr rtlCol="0" anchor="ctr"/>
+          <a:lstStyle/>
+          <a:p>
+            <a:pPr algn="ctr"/>
+          </a:p>
+        </p:txBody>
+      </p:sp>
+      <p:sp>
+        <p:nvSpPr>
+          <p:cNvPr id="5" name="Rectangle 4"/>
+          <p:cNvSpPr/>
+          <p:nvPr/>
+        </p:nvSpPr>
+        <p:spPr>
+          <a:xfrm>
+            <a:off x="731520" y="1783080"/>
+            <a:ext cx="63500" cy="594360"/>
+          </a:xfrm>
+          <a:prstGeom prst="rect">
+            <a:avLst/>
+          </a:prstGeom>
+          <a:solidFill>
+            <a:srgbClr val="00D2FF"/>
+          </a:solidFill>
+          <a:ln>
+            <a:noFill/>
+          </a:ln>
+        </p:spPr>
+        <p:style>
+          <a:lnRef idx="1">
+            <a:schemeClr val="accent1"/>
+          </a:lnRef>
+          <a:fillRef idx="3">
+            <a:schemeClr val="accent1"/>
+          </a:fillRef>
+          <a:effectRef idx="2">
+            <a:schemeClr val="accent1"/>
+          </a:effectRef>
+          <a:fontRef idx="minor">
+            <a:schemeClr val="lt1"/>
+          </a:fontRef>
+        </p:style>
+        <p:txBody>
+          <a:bodyPr rtlCol="0" anchor="ctr"/>
+          <a:lstStyle/>
+          <a:p>
+            <a:pPr algn="ctr"/>
+          </a:p>
+        </p:txBody>
+      </p:sp>
+      <p:sp>
+        <p:nvSpPr>
+          <p:cNvPr id="6" name="TextBox 5"/>
+          <p:cNvSpPr txBox="1"/>
+          <p:nvPr/>
+        </p:nvSpPr>
+        <p:spPr>
+          <a:xfrm>
+            <a:off x="914400" y="1901952"/>
+            <a:ext cx="914400" cy="365760"/>
+          </a:xfrm>
+          <a:prstGeom prst="rect">
+            <a:avLst/>
+          </a:prstGeom>
+          <a:noFill/>
+        </p:spPr>
+        <p:txBody>
+          <a:bodyPr wrap="square" lIns="0" rIns="0" tIns="0" bIns="0">
+            <a:spAutoFit/>
+          </a:bodyPr>
+          <a:lstStyle/>
+          <a:p>
+            <a:pPr algn="l">
+              <a:lnSpc>
+                <a:spcPct val="140000"/>
+              </a:lnSpc>
+              <a:defRPr sz="2000" b="1">
+                <a:solidFill>
+                  <a:srgbClr val="00D2FF"/>
+                </a:solidFill>
+                <a:latin typeface="Helvetica Neue"/>
+              </a:defRPr>
+            </a:pPr>
+            <a:r>
+              <a:t>讀</a:t>
+            </a:r>
+          </a:p>
+        </p:txBody>
+      </p:sp>
+      <p:sp>
+        <p:nvSpPr>
+          <p:cNvPr id="7" name="TextBox 6"/>
+          <p:cNvSpPr txBox="1"/>
+          <p:nvPr/>
+        </p:nvSpPr>
+        <p:spPr>
+          <a:xfrm>
+            <a:off x="2011680" y="1920240"/>
+            <a:ext cx="9144000" cy="365760"/>
+          </a:xfrm>
+          <a:prstGeom prst="rect">
+            <a:avLst/>
+          </a:prstGeom>
+          <a:noFill/>
+        </p:spPr>
+        <p:txBody>
+          <a:bodyPr wrap="square" lIns="0" rIns="0" tIns="0" bIns="0">
+            <a:spAutoFit/>
+          </a:bodyPr>
+          <a:lstStyle/>
+          <a:p>
+            <a:pPr algn="l">
+              <a:lnSpc>
+                <a:spcPct val="140000"/>
+              </a:lnSpc>
+              <a:defRPr sz="1800" b="0">
+                <a:solidFill>
+                  <a:srgbClr val="FFFFFF"/>
+                </a:solidFill>
+                <a:latin typeface="Helvetica Neue"/>
+              </a:defRPr>
+            </a:pPr>
+            <a:r>
+              <a:t>NotebookLM 研究筆記（Word 匯出）</a:t>
+            </a:r>
+          </a:p>
+        </p:txBody>
+      </p:sp>
+      <p:sp>
+        <p:nvSpPr>
+          <p:cNvPr id="8" name="Rectangle 7"/>
+          <p:cNvSpPr/>
+          <p:nvPr/>
+        </p:nvSpPr>
+        <p:spPr>
+          <a:xfrm>
+            <a:off x="731520" y="2496312"/>
+            <a:ext cx="10515600" cy="594360"/>
+          </a:xfrm>
+          <a:prstGeom prst="rect">
+            <a:avLst/>
+          </a:prstGeom>
+          <a:solidFill>
+            <a:srgbClr val="222B45"/>
+          </a:solidFill>
+          <a:ln>
+            <a:noFill/>
+          </a:ln>
+        </p:spPr>
+        <p:style>
+          <a:lnRef idx="1">
+            <a:schemeClr val="accent1"/>
+          </a:lnRef>
+          <a:fillRef idx="3">
+            <a:schemeClr val="accent1"/>
+          </a:fillRef>
+          <a:effectRef idx="2">
+            <a:schemeClr val="accent1"/>
+          </a:effectRef>
+          <a:fontRef idx="minor">
+            <a:schemeClr val="lt1"/>
+          </a:fontRef>
+        </p:style>
+        <p:txBody>
+          <a:bodyPr rtlCol="0" anchor="ctr"/>
+          <a:lstStyle/>
+          <a:p>
+            <a:pPr algn="ctr"/>
+          </a:p>
+        </p:txBody>
+      </p:sp>
+      <p:sp>
+        <p:nvSpPr>
+          <p:cNvPr id="9" name="Rectangle 8"/>
+          <p:cNvSpPr/>
+          <p:nvPr/>
+        </p:nvSpPr>
+        <p:spPr>
+          <a:xfrm>
+            <a:off x="731520" y="2496312"/>
+            <a:ext cx="63500" cy="594360"/>
           </a:xfrm>
           <a:prstGeom prst="rect">
             <a:avLst/>
@@ -21576,14 +21499,14 @@
       </p:sp>
       <p:sp>
         <p:nvSpPr>
-          <p:cNvPr id="4" name="TextBox 3"/>
+          <p:cNvPr id="10" name="TextBox 9"/>
           <p:cNvSpPr txBox="1"/>
           <p:nvPr/>
         </p:nvSpPr>
         <p:spPr>
           <a:xfrm>
-            <a:off x="731520" y="1691640"/>
-            <a:ext cx="10515600" cy="457200"/>
+            <a:off x="914400" y="2615184"/>
+            <a:ext cx="914400" cy="365760"/>
           </a:xfrm>
           <a:prstGeom prst="rect">
             <a:avLst/>
@@ -21600,29 +21523,68 @@
               <a:lnSpc>
                 <a:spcPct val="140000"/>
               </a:lnSpc>
-              <a:defRPr sz="2200" b="0">
-                <a:solidFill>
-                  <a:srgbClr val="BBBBCC"/>
+              <a:defRPr sz="2000" b="1">
+                <a:solidFill>
+                  <a:srgbClr val="FF6B6B"/>
                 </a:solidFill>
                 <a:latin typeface="Helvetica Neue"/>
               </a:defRPr>
             </a:pPr>
             <a:r>
-              <a:t>你打進去的每一個字，都會離開你的電腦</a:t>
-            </a:r>
-          </a:p>
-        </p:txBody>
-      </p:sp>
-      <p:sp>
-        <p:nvSpPr>
-          <p:cNvPr id="5" name="Rectangle 4"/>
+              <a:t>做</a:t>
+            </a:r>
+          </a:p>
+        </p:txBody>
+      </p:sp>
+      <p:sp>
+        <p:nvSpPr>
+          <p:cNvPr id="11" name="TextBox 10"/>
+          <p:cNvSpPr txBox="1"/>
+          <p:nvPr/>
+        </p:nvSpPr>
+        <p:spPr>
+          <a:xfrm>
+            <a:off x="2011680" y="2633472"/>
+            <a:ext cx="9144000" cy="365760"/>
+          </a:xfrm>
+          <a:prstGeom prst="rect">
+            <a:avLst/>
+          </a:prstGeom>
+          <a:noFill/>
+        </p:spPr>
+        <p:txBody>
+          <a:bodyPr wrap="square" lIns="0" rIns="0" tIns="0" bIns="0">
+            <a:spAutoFit/>
+          </a:bodyPr>
+          <a:lstStyle/>
+          <a:p>
+            <a:pPr algn="l">
+              <a:lnSpc>
+                <a:spcPct val="140000"/>
+              </a:lnSpc>
+              <a:defRPr sz="1800" b="0">
+                <a:solidFill>
+                  <a:srgbClr val="FFFFFF"/>
+                </a:solidFill>
+                <a:latin typeface="Helvetica Neue"/>
+              </a:defRPr>
+            </a:pPr>
+            <a:r>
+              <a:t>Napkin 因果圖 + Claude 小論文 Word 初稿</a:t>
+            </a:r>
+          </a:p>
+        </p:txBody>
+      </p:sp>
+      <p:sp>
+        <p:nvSpPr>
+          <p:cNvPr id="12" name="Rectangle 11"/>
           <p:cNvSpPr/>
           <p:nvPr/>
         </p:nvSpPr>
         <p:spPr>
           <a:xfrm>
-            <a:off x="731520" y="2468880"/>
-            <a:ext cx="5120640" cy="3200400"/>
+            <a:off x="731520" y="3209544"/>
+            <a:ext cx="10515600" cy="594360"/>
           </a:xfrm>
           <a:prstGeom prst="rect">
             <a:avLst/>
@@ -21658,20 +21620,20 @@
       </p:sp>
       <p:sp>
         <p:nvSpPr>
-          <p:cNvPr id="6" name="Rectangle 5"/>
+          <p:cNvPr id="13" name="Rectangle 12"/>
           <p:cNvSpPr/>
           <p:nvPr/>
         </p:nvSpPr>
         <p:spPr>
           <a:xfrm>
-            <a:off x="731520" y="2468880"/>
-            <a:ext cx="63500" cy="3200400"/>
+            <a:off x="731520" y="3209544"/>
+            <a:ext cx="63500" cy="594360"/>
           </a:xfrm>
           <a:prstGeom prst="rect">
             <a:avLst/>
           </a:prstGeom>
           <a:solidFill>
-            <a:srgbClr val="FF6B6B"/>
+            <a:srgbClr val="4ECB71"/>
           </a:solidFill>
           <a:ln>
             <a:noFill/>
@@ -21701,14 +21663,14 @@
       </p:sp>
       <p:sp>
         <p:nvSpPr>
-          <p:cNvPr id="7" name="TextBox 6"/>
+          <p:cNvPr id="14" name="TextBox 13"/>
           <p:cNvSpPr txBox="1"/>
           <p:nvPr/>
         </p:nvSpPr>
         <p:spPr>
           <a:xfrm>
-            <a:off x="914400" y="2560320"/>
-            <a:ext cx="4754880" cy="365760"/>
+            <a:off x="914400" y="3328416"/>
+            <a:ext cx="914400" cy="365760"/>
           </a:xfrm>
           <a:prstGeom prst="rect">
             <a:avLst/>
@@ -21725,29 +21687,29 @@
               <a:lnSpc>
                 <a:spcPct val="140000"/>
               </a:lnSpc>
-              <a:defRPr sz="1400" b="1">
-                <a:solidFill>
-                  <a:srgbClr val="FF6B6B"/>
+              <a:defRPr sz="2000" b="1">
+                <a:solidFill>
+                  <a:srgbClr val="4ECB71"/>
                 </a:solidFill>
                 <a:latin typeface="Helvetica Neue"/>
               </a:defRPr>
             </a:pPr>
             <a:r>
-              <a:t>不要丟</a:t>
-            </a:r>
-          </a:p>
-        </p:txBody>
-      </p:sp>
-      <p:sp>
-        <p:nvSpPr>
-          <p:cNvPr id="8" name="TextBox 7"/>
+              <a:t>學</a:t>
+            </a:r>
+          </a:p>
+        </p:txBody>
+      </p:sp>
+      <p:sp>
+        <p:nvSpPr>
+          <p:cNvPr id="15" name="TextBox 14"/>
           <p:cNvSpPr txBox="1"/>
           <p:nvPr/>
         </p:nvSpPr>
         <p:spPr>
           <a:xfrm>
-            <a:off x="914400" y="2971800"/>
-            <a:ext cx="4754880" cy="2651760"/>
+            <a:off x="2011680" y="3346704"/>
+            <a:ext cx="9144000" cy="365760"/>
           </a:xfrm>
           <a:prstGeom prst="rect">
             <a:avLst/>
@@ -21764,7 +21726,7 @@
               <a:lnSpc>
                 <a:spcPct val="140000"/>
               </a:lnSpc>
-              <a:defRPr sz="1700" b="0">
+              <a:defRPr sz="1800" b="0">
                 <a:solidFill>
                   <a:srgbClr val="FFFFFF"/>
                 </a:solidFill>
@@ -21772,31 +21734,21 @@
               </a:defRPr>
             </a:pPr>
             <a:r>
-              <a:t>▸  日記、心情、家裡狀況</a:t>
-            </a:r>
-            <a:br/>
-            <a:br/>
-            <a:r>
-              <a:t>▸  同學個資、輔導紀錄</a:t>
-            </a:r>
-            <a:br/>
-            <a:br/>
-            <a:r>
-              <a:t>▸  未公開的競賽作品</a:t>
-            </a:r>
-          </a:p>
-        </p:txBody>
-      </p:sp>
-      <p:sp>
-        <p:nvSpPr>
-          <p:cNvPr id="9" name="Rectangle 8"/>
+              <a:t>來回三輪改出來的反思，更新進 Word 完成定稿</a:t>
+            </a:r>
+          </a:p>
+        </p:txBody>
+      </p:sp>
+      <p:sp>
+        <p:nvSpPr>
+          <p:cNvPr id="16" name="Rectangle 15"/>
           <p:cNvSpPr/>
           <p:nvPr/>
         </p:nvSpPr>
         <p:spPr>
           <a:xfrm>
-            <a:off x="6126480" y="2468880"/>
-            <a:ext cx="5120640" cy="3200400"/>
+            <a:off x="731520" y="3922776"/>
+            <a:ext cx="10515600" cy="594360"/>
           </a:xfrm>
           <a:prstGeom prst="rect">
             <a:avLst/>
@@ -21832,14 +21784,342 @@
       </p:sp>
       <p:sp>
         <p:nvSpPr>
-          <p:cNvPr id="10" name="Rectangle 9"/>
+          <p:cNvPr id="17" name="Rectangle 16"/>
           <p:cNvSpPr/>
           <p:nvPr/>
         </p:nvSpPr>
         <p:spPr>
           <a:xfrm>
-            <a:off x="6126480" y="2468880"/>
-            <a:ext cx="63500" cy="3200400"/>
+            <a:off x="731520" y="3922776"/>
+            <a:ext cx="63500" cy="594360"/>
+          </a:xfrm>
+          <a:prstGeom prst="rect">
+            <a:avLst/>
+          </a:prstGeom>
+          <a:solidFill>
+            <a:srgbClr val="FFAA33"/>
+          </a:solidFill>
+          <a:ln>
+            <a:noFill/>
+          </a:ln>
+        </p:spPr>
+        <p:style>
+          <a:lnRef idx="1">
+            <a:schemeClr val="accent1"/>
+          </a:lnRef>
+          <a:fillRef idx="3">
+            <a:schemeClr val="accent1"/>
+          </a:fillRef>
+          <a:effectRef idx="2">
+            <a:schemeClr val="accent1"/>
+          </a:effectRef>
+          <a:fontRef idx="minor">
+            <a:schemeClr val="lt1"/>
+          </a:fontRef>
+        </p:style>
+        <p:txBody>
+          <a:bodyPr rtlCol="0" anchor="ctr"/>
+          <a:lstStyle/>
+          <a:p>
+            <a:pPr algn="ctr"/>
+          </a:p>
+        </p:txBody>
+      </p:sp>
+      <p:sp>
+        <p:nvSpPr>
+          <p:cNvPr id="18" name="TextBox 17"/>
+          <p:cNvSpPr txBox="1"/>
+          <p:nvPr/>
+        </p:nvSpPr>
+        <p:spPr>
+          <a:xfrm>
+            <a:off x="914400" y="4041648"/>
+            <a:ext cx="914400" cy="365760"/>
+          </a:xfrm>
+          <a:prstGeom prst="rect">
+            <a:avLst/>
+          </a:prstGeom>
+          <a:noFill/>
+        </p:spPr>
+        <p:txBody>
+          <a:bodyPr wrap="square" lIns="0" rIns="0" tIns="0" bIns="0">
+            <a:spAutoFit/>
+          </a:bodyPr>
+          <a:lstStyle/>
+          <a:p>
+            <a:pPr algn="l">
+              <a:lnSpc>
+                <a:spcPct val="140000"/>
+              </a:lnSpc>
+              <a:defRPr sz="2000" b="1">
+                <a:solidFill>
+                  <a:srgbClr val="FFAA33"/>
+                </a:solidFill>
+                <a:latin typeface="Helvetica Neue"/>
+              </a:defRPr>
+            </a:pPr>
+            <a:r>
+              <a:t>簡報</a:t>
+            </a:r>
+          </a:p>
+        </p:txBody>
+      </p:sp>
+      <p:sp>
+        <p:nvSpPr>
+          <p:cNvPr id="19" name="TextBox 18"/>
+          <p:cNvSpPr txBox="1"/>
+          <p:nvPr/>
+        </p:nvSpPr>
+        <p:spPr>
+          <a:xfrm>
+            <a:off x="2011680" y="4059936"/>
+            <a:ext cx="9144000" cy="365760"/>
+          </a:xfrm>
+          <a:prstGeom prst="rect">
+            <a:avLst/>
+          </a:prstGeom>
+          <a:noFill/>
+        </p:spPr>
+        <p:txBody>
+          <a:bodyPr wrap="square" lIns="0" rIns="0" tIns="0" bIns="0">
+            <a:spAutoFit/>
+          </a:bodyPr>
+          <a:lstStyle/>
+          <a:p>
+            <a:pPr algn="l">
+              <a:lnSpc>
+                <a:spcPct val="140000"/>
+              </a:lnSpc>
+              <a:defRPr sz="1800" b="0">
+                <a:solidFill>
+                  <a:srgbClr val="FFFFFF"/>
+                </a:solidFill>
+                <a:latin typeface="Helvetica Neue"/>
+              </a:defRPr>
+            </a:pPr>
+            <a:r>
+              <a:t>Gamma 或 Claude 生成的報告簡報</a:t>
+            </a:r>
+          </a:p>
+        </p:txBody>
+      </p:sp>
+      <p:sp>
+        <p:nvSpPr>
+          <p:cNvPr id="20" name="Rectangle 19"/>
+          <p:cNvSpPr/>
+          <p:nvPr/>
+        </p:nvSpPr>
+        <p:spPr>
+          <a:xfrm>
+            <a:off x="731520" y="4636008"/>
+            <a:ext cx="10515600" cy="594360"/>
+          </a:xfrm>
+          <a:prstGeom prst="rect">
+            <a:avLst/>
+          </a:prstGeom>
+          <a:solidFill>
+            <a:srgbClr val="222B45"/>
+          </a:solidFill>
+          <a:ln>
+            <a:noFill/>
+          </a:ln>
+        </p:spPr>
+        <p:style>
+          <a:lnRef idx="1">
+            <a:schemeClr val="accent1"/>
+          </a:lnRef>
+          <a:fillRef idx="3">
+            <a:schemeClr val="accent1"/>
+          </a:fillRef>
+          <a:effectRef idx="2">
+            <a:schemeClr val="accent1"/>
+          </a:effectRef>
+          <a:fontRef idx="minor">
+            <a:schemeClr val="lt1"/>
+          </a:fontRef>
+        </p:style>
+        <p:txBody>
+          <a:bodyPr rtlCol="0" anchor="ctr"/>
+          <a:lstStyle/>
+          <a:p>
+            <a:pPr algn="ctr"/>
+          </a:p>
+        </p:txBody>
+      </p:sp>
+      <p:sp>
+        <p:nvSpPr>
+          <p:cNvPr id="21" name="Rectangle 20"/>
+          <p:cNvSpPr/>
+          <p:nvPr/>
+        </p:nvSpPr>
+        <p:spPr>
+          <a:xfrm>
+            <a:off x="731520" y="4636008"/>
+            <a:ext cx="63500" cy="594360"/>
+          </a:xfrm>
+          <a:prstGeom prst="rect">
+            <a:avLst/>
+          </a:prstGeom>
+          <a:solidFill>
+            <a:srgbClr val="CC66FF"/>
+          </a:solidFill>
+          <a:ln>
+            <a:noFill/>
+          </a:ln>
+        </p:spPr>
+        <p:style>
+          <a:lnRef idx="1">
+            <a:schemeClr val="accent1"/>
+          </a:lnRef>
+          <a:fillRef idx="3">
+            <a:schemeClr val="accent1"/>
+          </a:fillRef>
+          <a:effectRef idx="2">
+            <a:schemeClr val="accent1"/>
+          </a:effectRef>
+          <a:fontRef idx="minor">
+            <a:schemeClr val="lt1"/>
+          </a:fontRef>
+        </p:style>
+        <p:txBody>
+          <a:bodyPr rtlCol="0" anchor="ctr"/>
+          <a:lstStyle/>
+          <a:p>
+            <a:pPr algn="ctr"/>
+          </a:p>
+        </p:txBody>
+      </p:sp>
+      <p:sp>
+        <p:nvSpPr>
+          <p:cNvPr id="22" name="TextBox 21"/>
+          <p:cNvSpPr txBox="1"/>
+          <p:nvPr/>
+        </p:nvSpPr>
+        <p:spPr>
+          <a:xfrm>
+            <a:off x="914400" y="4754880"/>
+            <a:ext cx="914400" cy="365760"/>
+          </a:xfrm>
+          <a:prstGeom prst="rect">
+            <a:avLst/>
+          </a:prstGeom>
+          <a:noFill/>
+        </p:spPr>
+        <p:txBody>
+          <a:bodyPr wrap="square" lIns="0" rIns="0" tIns="0" bIns="0">
+            <a:spAutoFit/>
+          </a:bodyPr>
+          <a:lstStyle/>
+          <a:p>
+            <a:pPr algn="l">
+              <a:lnSpc>
+                <a:spcPct val="140000"/>
+              </a:lnSpc>
+              <a:defRPr sz="2000" b="1">
+                <a:solidFill>
+                  <a:srgbClr val="CC66FF"/>
+                </a:solidFill>
+                <a:latin typeface="Helvetica Neue"/>
+              </a:defRPr>
+            </a:pPr>
+            <a:r>
+              <a:t>創造</a:t>
+            </a:r>
+          </a:p>
+        </p:txBody>
+      </p:sp>
+      <p:sp>
+        <p:nvSpPr>
+          <p:cNvPr id="23" name="TextBox 22"/>
+          <p:cNvSpPr txBox="1"/>
+          <p:nvPr/>
+        </p:nvSpPr>
+        <p:spPr>
+          <a:xfrm>
+            <a:off x="2011680" y="4773168"/>
+            <a:ext cx="9144000" cy="365760"/>
+          </a:xfrm>
+          <a:prstGeom prst="rect">
+            <a:avLst/>
+          </a:prstGeom>
+          <a:noFill/>
+        </p:spPr>
+        <p:txBody>
+          <a:bodyPr wrap="square" lIns="0" rIns="0" tIns="0" bIns="0">
+            <a:spAutoFit/>
+          </a:bodyPr>
+          <a:lstStyle/>
+          <a:p>
+            <a:pPr algn="l">
+              <a:lnSpc>
+                <a:spcPct val="140000"/>
+              </a:lnSpc>
+              <a:defRPr sz="1800" b="0">
+                <a:solidFill>
+                  <a:srgbClr val="FFFFFF"/>
+                </a:solidFill>
+                <a:latin typeface="Helvetica Neue"/>
+              </a:defRPr>
+            </a:pPr>
+            <a:r>
+              <a:t>（加分）互動時間軸網頁 + Ideogram 封面圖</a:t>
+            </a:r>
+          </a:p>
+        </p:txBody>
+      </p:sp>
+      <p:sp>
+        <p:nvSpPr>
+          <p:cNvPr id="24" name="Rectangle 23"/>
+          <p:cNvSpPr/>
+          <p:nvPr/>
+        </p:nvSpPr>
+        <p:spPr>
+          <a:xfrm>
+            <a:off x="731520" y="5577840"/>
+            <a:ext cx="10515600" cy="868680"/>
+          </a:xfrm>
+          <a:prstGeom prst="rect">
+            <a:avLst/>
+          </a:prstGeom>
+          <a:solidFill>
+            <a:srgbClr val="222B45"/>
+          </a:solidFill>
+          <a:ln>
+            <a:noFill/>
+          </a:ln>
+        </p:spPr>
+        <p:style>
+          <a:lnRef idx="1">
+            <a:schemeClr val="accent1"/>
+          </a:lnRef>
+          <a:fillRef idx="3">
+            <a:schemeClr val="accent1"/>
+          </a:fillRef>
+          <a:effectRef idx="2">
+            <a:schemeClr val="accent1"/>
+          </a:effectRef>
+          <a:fontRef idx="minor">
+            <a:schemeClr val="lt1"/>
+          </a:fontRef>
+        </p:style>
+        <p:txBody>
+          <a:bodyPr rtlCol="0" anchor="ctr"/>
+          <a:lstStyle/>
+          <a:p>
+            <a:pPr algn="ctr"/>
+          </a:p>
+        </p:txBody>
+      </p:sp>
+      <p:sp>
+        <p:nvSpPr>
+          <p:cNvPr id="25" name="Rectangle 24"/>
+          <p:cNvSpPr/>
+          <p:nvPr/>
+        </p:nvSpPr>
+        <p:spPr>
+          <a:xfrm>
+            <a:off x="731520" y="5577840"/>
+            <a:ext cx="63500" cy="868680"/>
           </a:xfrm>
           <a:prstGeom prst="rect">
             <a:avLst/>
@@ -21875,53 +22155,14 @@
       </p:sp>
       <p:sp>
         <p:nvSpPr>
-          <p:cNvPr id="11" name="TextBox 10"/>
+          <p:cNvPr id="26" name="TextBox 25"/>
           <p:cNvSpPr txBox="1"/>
           <p:nvPr/>
         </p:nvSpPr>
         <p:spPr>
           <a:xfrm>
-            <a:off x="6309360" y="2560320"/>
-            <a:ext cx="4754880" cy="365760"/>
-          </a:xfrm>
-          <a:prstGeom prst="rect">
-            <a:avLst/>
-          </a:prstGeom>
-          <a:noFill/>
-        </p:spPr>
-        <p:txBody>
-          <a:bodyPr wrap="square" lIns="0" rIns="0" tIns="0" bIns="0">
-            <a:spAutoFit/>
-          </a:bodyPr>
-          <a:lstStyle/>
-          <a:p>
-            <a:pPr algn="l">
-              <a:lnSpc>
-                <a:spcPct val="140000"/>
-              </a:lnSpc>
-              <a:defRPr sz="1400" b="1">
-                <a:solidFill>
-                  <a:srgbClr val="4ECB71"/>
-                </a:solidFill>
-                <a:latin typeface="Helvetica Neue"/>
-              </a:defRPr>
-            </a:pPr>
-            <a:r>
-              <a:t>判準</a:t>
-            </a:r>
-          </a:p>
-        </p:txBody>
-      </p:sp>
-      <p:sp>
-        <p:nvSpPr>
-          <p:cNvPr id="12" name="TextBox 11"/>
-          <p:cNvSpPr txBox="1"/>
-          <p:nvPr/>
-        </p:nvSpPr>
-        <p:spPr>
-          <a:xfrm>
-            <a:off x="6309360" y="2971800"/>
-            <a:ext cx="4754880" cy="2651760"/>
+            <a:off x="914400" y="5760720"/>
+            <a:ext cx="10149840" cy="502920"/>
           </a:xfrm>
           <a:prstGeom prst="rect">
             <a:avLst/>
@@ -21946,16 +22187,7 @@
               </a:defRPr>
             </a:pPr>
             <a:r>
-              <a:t>「這段話被截圖貼到網路上，</a:t>
-            </a:r>
-            <a:br/>
-            <a:r>
-              <a:t>我會崩潰嗎？」</a:t>
-            </a:r>
-            <a:br/>
-            <a:br/>
-            <a:r>
-              <a:t>會  →  別丟雲端</a:t>
+              <a:t>三小時前你還在煩惱學習歷程——現在你手上有 Word + 簡報，可能還有互動網頁</a:t>
             </a:r>
           </a:p>
         </p:txBody>
@@ -22020,7 +22252,7 @@
               </a:defRPr>
             </a:pPr>
             <a:r>
-              <a:t>你現在手上有什麼？</a:t>
+              <a:t>老師示範：跑完流程長這樣</a:t>
             </a:r>
           </a:p>
         </p:txBody>
@@ -22035,6 +22267,131 @@
           <a:xfrm>
             <a:off x="731520" y="1325880"/>
             <a:ext cx="10515600" cy="25400"/>
+          </a:xfrm>
+          <a:prstGeom prst="rect">
+            <a:avLst/>
+          </a:prstGeom>
+          <a:solidFill>
+            <a:srgbClr val="4ECB71"/>
+          </a:solidFill>
+          <a:ln>
+            <a:noFill/>
+          </a:ln>
+        </p:spPr>
+        <p:style>
+          <a:lnRef idx="1">
+            <a:schemeClr val="accent1"/>
+          </a:lnRef>
+          <a:fillRef idx="3">
+            <a:schemeClr val="accent1"/>
+          </a:fillRef>
+          <a:effectRef idx="2">
+            <a:schemeClr val="accent1"/>
+          </a:effectRef>
+          <a:fontRef idx="minor">
+            <a:schemeClr val="lt1"/>
+          </a:fontRef>
+        </p:style>
+        <p:txBody>
+          <a:bodyPr rtlCol="0" anchor="ctr"/>
+          <a:lstStyle/>
+          <a:p>
+            <a:pPr algn="ctr"/>
+          </a:p>
+        </p:txBody>
+      </p:sp>
+      <p:sp>
+        <p:nvSpPr>
+          <p:cNvPr id="4" name="TextBox 3"/>
+          <p:cNvSpPr txBox="1"/>
+          <p:nvPr/>
+        </p:nvSpPr>
+        <p:spPr>
+          <a:xfrm>
+            <a:off x="731520" y="1691640"/>
+            <a:ext cx="10515600" cy="457200"/>
+          </a:xfrm>
+          <a:prstGeom prst="rect">
+            <a:avLst/>
+          </a:prstGeom>
+          <a:noFill/>
+        </p:spPr>
+        <p:txBody>
+          <a:bodyPr wrap="square" lIns="0" rIns="0" tIns="0" bIns="0">
+            <a:spAutoFit/>
+          </a:bodyPr>
+          <a:lstStyle/>
+          <a:p>
+            <a:pPr algn="l">
+              <a:lnSpc>
+                <a:spcPct val="140000"/>
+              </a:lnSpc>
+              <a:defRPr sz="2000" b="0">
+                <a:solidFill>
+                  <a:srgbClr val="BBBBCC"/>
+                </a:solidFill>
+                <a:latin typeface="Helvetica Neue"/>
+              </a:defRPr>
+            </a:pPr>
+            <a:r>
+              <a:t>以「為什麼是雲林？」為題跑完整套流程，產出：</a:t>
+            </a:r>
+          </a:p>
+        </p:txBody>
+      </p:sp>
+      <p:sp>
+        <p:nvSpPr>
+          <p:cNvPr id="5" name="Rectangle 4"/>
+          <p:cNvSpPr/>
+          <p:nvPr/>
+        </p:nvSpPr>
+        <p:spPr>
+          <a:xfrm>
+            <a:off x="731520" y="2377440"/>
+            <a:ext cx="5212080" cy="1371600"/>
+          </a:xfrm>
+          <a:prstGeom prst="rect">
+            <a:avLst/>
+          </a:prstGeom>
+          <a:solidFill>
+            <a:srgbClr val="222B45"/>
+          </a:solidFill>
+          <a:ln>
+            <a:noFill/>
+          </a:ln>
+        </p:spPr>
+        <p:style>
+          <a:lnRef idx="1">
+            <a:schemeClr val="accent1"/>
+          </a:lnRef>
+          <a:fillRef idx="3">
+            <a:schemeClr val="accent1"/>
+          </a:fillRef>
+          <a:effectRef idx="2">
+            <a:schemeClr val="accent1"/>
+          </a:effectRef>
+          <a:fontRef idx="minor">
+            <a:schemeClr val="lt1"/>
+          </a:fontRef>
+        </p:style>
+        <p:txBody>
+          <a:bodyPr rtlCol="0" anchor="ctr"/>
+          <a:lstStyle/>
+          <a:p>
+            <a:pPr algn="ctr"/>
+          </a:p>
+        </p:txBody>
+      </p:sp>
+      <p:sp>
+        <p:nvSpPr>
+          <p:cNvPr id="6" name="Rectangle 5"/>
+          <p:cNvSpPr/>
+          <p:nvPr/>
+        </p:nvSpPr>
+        <p:spPr>
+          <a:xfrm>
+            <a:off x="731520" y="2377440"/>
+            <a:ext cx="5212080" cy="50800"/>
           </a:xfrm>
           <a:prstGeom prst="rect">
             <a:avLst/>
@@ -22070,14 +22427,92 @@
       </p:sp>
       <p:sp>
         <p:nvSpPr>
-          <p:cNvPr id="4" name="Rectangle 3"/>
+          <p:cNvPr id="7" name="TextBox 6"/>
+          <p:cNvSpPr txBox="1"/>
+          <p:nvPr/>
+        </p:nvSpPr>
+        <p:spPr>
+          <a:xfrm>
+            <a:off x="1005840" y="2606040"/>
+            <a:ext cx="4846320" cy="457200"/>
+          </a:xfrm>
+          <a:prstGeom prst="rect">
+            <a:avLst/>
+          </a:prstGeom>
+          <a:noFill/>
+        </p:spPr>
+        <p:txBody>
+          <a:bodyPr wrap="square" lIns="0" rIns="0" tIns="0" bIns="0">
+            <a:spAutoFit/>
+          </a:bodyPr>
+          <a:lstStyle/>
+          <a:p>
+            <a:pPr algn="l">
+              <a:lnSpc>
+                <a:spcPct val="140000"/>
+              </a:lnSpc>
+              <a:defRPr sz="2200" b="1">
+                <a:solidFill>
+                  <a:srgbClr val="FFFFFF"/>
+                </a:solidFill>
+                <a:latin typeface="Helvetica Neue"/>
+              </a:defRPr>
+            </a:pPr>
+            <a:r>
+              <a:t>⏱  互動時間軸</a:t>
+            </a:r>
+          </a:p>
+        </p:txBody>
+      </p:sp>
+      <p:sp>
+        <p:nvSpPr>
+          <p:cNvPr id="8" name="TextBox 7"/>
+          <p:cNvSpPr txBox="1"/>
+          <p:nvPr/>
+        </p:nvSpPr>
+        <p:spPr>
+          <a:xfrm>
+            <a:off x="1005840" y="3154680"/>
+            <a:ext cx="4846320" cy="457200"/>
+          </a:xfrm>
+          <a:prstGeom prst="rect">
+            <a:avLst/>
+          </a:prstGeom>
+          <a:noFill/>
+        </p:spPr>
+        <p:txBody>
+          <a:bodyPr wrap="square" lIns="0" rIns="0" tIns="0" bIns="0">
+            <a:spAutoFit/>
+          </a:bodyPr>
+          <a:lstStyle/>
+          <a:p>
+            <a:pPr algn="l">
+              <a:lnSpc>
+                <a:spcPct val="140000"/>
+              </a:lnSpc>
+              <a:defRPr sz="1500" b="0">
+                <a:solidFill>
+                  <a:srgbClr val="BBBBCC"/>
+                </a:solidFill>
+                <a:latin typeface="Helvetica Neue"/>
+              </a:defRPr>
+            </a:pPr>
+            <a:r>
+              <a:t>虎尾糖廠時間軸.html</a:t>
+            </a:r>
+          </a:p>
+        </p:txBody>
+      </p:sp>
+      <p:sp>
+        <p:nvSpPr>
+          <p:cNvPr id="9" name="Rectangle 8"/>
           <p:cNvSpPr/>
           <p:nvPr/>
         </p:nvSpPr>
         <p:spPr>
           <a:xfrm>
-            <a:off x="731520" y="1783080"/>
-            <a:ext cx="10515600" cy="594360"/>
+            <a:off x="6217920" y="2377440"/>
+            <a:ext cx="5212080" cy="1371600"/>
           </a:xfrm>
           <a:prstGeom prst="rect">
             <a:avLst/>
@@ -22113,20 +22548,20 @@
       </p:sp>
       <p:sp>
         <p:nvSpPr>
-          <p:cNvPr id="5" name="Rectangle 4"/>
+          <p:cNvPr id="10" name="Rectangle 9"/>
           <p:cNvSpPr/>
           <p:nvPr/>
         </p:nvSpPr>
         <p:spPr>
           <a:xfrm>
-            <a:off x="731520" y="1783080"/>
-            <a:ext cx="63500" cy="594360"/>
+            <a:off x="6217920" y="2377440"/>
+            <a:ext cx="5212080" cy="50800"/>
           </a:xfrm>
           <a:prstGeom prst="rect">
             <a:avLst/>
           </a:prstGeom>
           <a:solidFill>
-            <a:srgbClr val="00D2FF"/>
+            <a:srgbClr val="FFAA33"/>
           </a:solidFill>
           <a:ln>
             <a:noFill/>
@@ -22156,14 +22591,14 @@
       </p:sp>
       <p:sp>
         <p:nvSpPr>
-          <p:cNvPr id="6" name="TextBox 5"/>
+          <p:cNvPr id="11" name="TextBox 10"/>
           <p:cNvSpPr txBox="1"/>
           <p:nvPr/>
         </p:nvSpPr>
         <p:spPr>
           <a:xfrm>
-            <a:off x="914400" y="1901952"/>
-            <a:ext cx="914400" cy="365760"/>
+            <a:off x="6492240" y="2606040"/>
+            <a:ext cx="4846320" cy="457200"/>
           </a:xfrm>
           <a:prstGeom prst="rect">
             <a:avLst/>
@@ -22180,29 +22615,29 @@
               <a:lnSpc>
                 <a:spcPct val="140000"/>
               </a:lnSpc>
-              <a:defRPr sz="2000" b="1">
-                <a:solidFill>
-                  <a:srgbClr val="00D2FF"/>
+              <a:defRPr sz="2200" b="1">
+                <a:solidFill>
+                  <a:srgbClr val="FFFFFF"/>
                 </a:solidFill>
                 <a:latin typeface="Helvetica Neue"/>
               </a:defRPr>
             </a:pPr>
             <a:r>
-              <a:t>讀</a:t>
-            </a:r>
-          </a:p>
-        </p:txBody>
-      </p:sp>
-      <p:sp>
-        <p:nvSpPr>
-          <p:cNvPr id="7" name="TextBox 6"/>
+              <a:t>📄  小論文 Word 檔</a:t>
+            </a:r>
+          </a:p>
+        </p:txBody>
+      </p:sp>
+      <p:sp>
+        <p:nvSpPr>
+          <p:cNvPr id="12" name="TextBox 11"/>
           <p:cNvSpPr txBox="1"/>
           <p:nvPr/>
         </p:nvSpPr>
         <p:spPr>
           <a:xfrm>
-            <a:off x="2011680" y="1920240"/>
-            <a:ext cx="9144000" cy="365760"/>
+            <a:off x="6492240" y="3154680"/>
+            <a:ext cx="4846320" cy="457200"/>
           </a:xfrm>
           <a:prstGeom prst="rect">
             <a:avLst/>
@@ -22219,29 +22654,29 @@
               <a:lnSpc>
                 <a:spcPct val="140000"/>
               </a:lnSpc>
-              <a:defRPr sz="1800" b="0">
-                <a:solidFill>
-                  <a:srgbClr val="FFFFFF"/>
+              <a:defRPr sz="1500" b="0">
+                <a:solidFill>
+                  <a:srgbClr val="BBBBCC"/>
                 </a:solidFill>
                 <a:latin typeface="Helvetica Neue"/>
               </a:defRPr>
             </a:pPr>
             <a:r>
-              <a:t>NotebookLM 研究筆記（Word 匯出）</a:t>
-            </a:r>
-          </a:p>
-        </p:txBody>
-      </p:sp>
-      <p:sp>
-        <p:nvSpPr>
-          <p:cNvPr id="8" name="Rectangle 7"/>
+              <a:t>Step 3 + 4 定稿</a:t>
+            </a:r>
+          </a:p>
+        </p:txBody>
+      </p:sp>
+      <p:sp>
+        <p:nvSpPr>
+          <p:cNvPr id="13" name="Rectangle 12"/>
           <p:cNvSpPr/>
           <p:nvPr/>
         </p:nvSpPr>
         <p:spPr>
           <a:xfrm>
-            <a:off x="731520" y="2496312"/>
-            <a:ext cx="10515600" cy="594360"/>
+            <a:off x="731520" y="3931920"/>
+            <a:ext cx="5212080" cy="1371600"/>
           </a:xfrm>
           <a:prstGeom prst="rect">
             <a:avLst/>
@@ -22277,20 +22712,20 @@
       </p:sp>
       <p:sp>
         <p:nvSpPr>
-          <p:cNvPr id="9" name="Rectangle 8"/>
+          <p:cNvPr id="14" name="Rectangle 13"/>
           <p:cNvSpPr/>
           <p:nvPr/>
         </p:nvSpPr>
         <p:spPr>
           <a:xfrm>
-            <a:off x="731520" y="2496312"/>
-            <a:ext cx="63500" cy="594360"/>
+            <a:off x="731520" y="3931920"/>
+            <a:ext cx="5212080" cy="50800"/>
           </a:xfrm>
           <a:prstGeom prst="rect">
             <a:avLst/>
           </a:prstGeom>
           <a:solidFill>
-            <a:srgbClr val="FF6B6B"/>
+            <a:srgbClr val="4ECB71"/>
           </a:solidFill>
           <a:ln>
             <a:noFill/>
@@ -22320,14 +22755,14 @@
       </p:sp>
       <p:sp>
         <p:nvSpPr>
-          <p:cNvPr id="10" name="TextBox 9"/>
+          <p:cNvPr id="15" name="TextBox 14"/>
           <p:cNvSpPr txBox="1"/>
           <p:nvPr/>
         </p:nvSpPr>
         <p:spPr>
           <a:xfrm>
-            <a:off x="914400" y="2615184"/>
-            <a:ext cx="914400" cy="365760"/>
+            <a:off x="1005840" y="4160520"/>
+            <a:ext cx="4846320" cy="457200"/>
           </a:xfrm>
           <a:prstGeom prst="rect">
             <a:avLst/>
@@ -22344,29 +22779,29 @@
               <a:lnSpc>
                 <a:spcPct val="140000"/>
               </a:lnSpc>
-              <a:defRPr sz="2000" b="1">
-                <a:solidFill>
-                  <a:srgbClr val="FF6B6B"/>
+              <a:defRPr sz="2200" b="1">
+                <a:solidFill>
+                  <a:srgbClr val="FFFFFF"/>
                 </a:solidFill>
                 <a:latin typeface="Helvetica Neue"/>
               </a:defRPr>
             </a:pPr>
             <a:r>
-              <a:t>做</a:t>
-            </a:r>
-          </a:p>
-        </p:txBody>
-      </p:sp>
-      <p:sp>
-        <p:nvSpPr>
-          <p:cNvPr id="11" name="TextBox 10"/>
+              <a:t>🎞  Gamma 簡報</a:t>
+            </a:r>
+          </a:p>
+        </p:txBody>
+      </p:sp>
+      <p:sp>
+        <p:nvSpPr>
+          <p:cNvPr id="16" name="TextBox 15"/>
           <p:cNvSpPr txBox="1"/>
           <p:nvPr/>
         </p:nvSpPr>
         <p:spPr>
           <a:xfrm>
-            <a:off x="2011680" y="2633472"/>
-            <a:ext cx="9144000" cy="365760"/>
+            <a:off x="1005840" y="4709160"/>
+            <a:ext cx="4846320" cy="457200"/>
           </a:xfrm>
           <a:prstGeom prst="rect">
             <a:avLst/>
@@ -22383,29 +22818,29 @@
               <a:lnSpc>
                 <a:spcPct val="140000"/>
               </a:lnSpc>
-              <a:defRPr sz="1800" b="0">
-                <a:solidFill>
-                  <a:srgbClr val="FFFFFF"/>
+              <a:defRPr sz="1500" b="0">
+                <a:solidFill>
+                  <a:srgbClr val="BBBBCC"/>
                 </a:solidFill>
                 <a:latin typeface="Helvetica Neue"/>
               </a:defRPr>
             </a:pPr>
             <a:r>
-              <a:t>Napkin 因果圖 + Claude 小論文 Word 初稿</a:t>
-            </a:r>
-          </a:p>
-        </p:txBody>
-      </p:sp>
-      <p:sp>
-        <p:nvSpPr>
-          <p:cNvPr id="12" name="Rectangle 11"/>
+              <a:t>Step 5 路徑 A</a:t>
+            </a:r>
+          </a:p>
+        </p:txBody>
+      </p:sp>
+      <p:sp>
+        <p:nvSpPr>
+          <p:cNvPr id="17" name="Rectangle 16"/>
           <p:cNvSpPr/>
           <p:nvPr/>
         </p:nvSpPr>
         <p:spPr>
           <a:xfrm>
-            <a:off x="731520" y="3209544"/>
-            <a:ext cx="10515600" cy="594360"/>
+            <a:off x="6217920" y="3931920"/>
+            <a:ext cx="5212080" cy="1371600"/>
           </a:xfrm>
           <a:prstGeom prst="rect">
             <a:avLst/>
@@ -22441,14 +22876,178 @@
       </p:sp>
       <p:sp>
         <p:nvSpPr>
-          <p:cNvPr id="13" name="Rectangle 12"/>
+          <p:cNvPr id="18" name="Rectangle 17"/>
           <p:cNvSpPr/>
           <p:nvPr/>
         </p:nvSpPr>
         <p:spPr>
           <a:xfrm>
-            <a:off x="731520" y="3209544"/>
-            <a:ext cx="63500" cy="594360"/>
+            <a:off x="6217920" y="3931920"/>
+            <a:ext cx="5212080" cy="50800"/>
+          </a:xfrm>
+          <a:prstGeom prst="rect">
+            <a:avLst/>
+          </a:prstGeom>
+          <a:solidFill>
+            <a:srgbClr val="CC66FF"/>
+          </a:solidFill>
+          <a:ln>
+            <a:noFill/>
+          </a:ln>
+        </p:spPr>
+        <p:style>
+          <a:lnRef idx="1">
+            <a:schemeClr val="accent1"/>
+          </a:lnRef>
+          <a:fillRef idx="3">
+            <a:schemeClr val="accent1"/>
+          </a:fillRef>
+          <a:effectRef idx="2">
+            <a:schemeClr val="accent1"/>
+          </a:effectRef>
+          <a:fontRef idx="minor">
+            <a:schemeClr val="lt1"/>
+          </a:fontRef>
+        </p:style>
+        <p:txBody>
+          <a:bodyPr rtlCol="0" anchor="ctr"/>
+          <a:lstStyle/>
+          <a:p>
+            <a:pPr algn="ctr"/>
+          </a:p>
+        </p:txBody>
+      </p:sp>
+      <p:sp>
+        <p:nvSpPr>
+          <p:cNvPr id="19" name="TextBox 18"/>
+          <p:cNvSpPr txBox="1"/>
+          <p:nvPr/>
+        </p:nvSpPr>
+        <p:spPr>
+          <a:xfrm>
+            <a:off x="6492240" y="4160520"/>
+            <a:ext cx="4846320" cy="457200"/>
+          </a:xfrm>
+          <a:prstGeom prst="rect">
+            <a:avLst/>
+          </a:prstGeom>
+          <a:noFill/>
+        </p:spPr>
+        <p:txBody>
+          <a:bodyPr wrap="square" lIns="0" rIns="0" tIns="0" bIns="0">
+            <a:spAutoFit/>
+          </a:bodyPr>
+          <a:lstStyle/>
+          <a:p>
+            <a:pPr algn="l">
+              <a:lnSpc>
+                <a:spcPct val="140000"/>
+              </a:lnSpc>
+              <a:defRPr sz="2200" b="1">
+                <a:solidFill>
+                  <a:srgbClr val="FFFFFF"/>
+                </a:solidFill>
+                <a:latin typeface="Helvetica Neue"/>
+              </a:defRPr>
+            </a:pPr>
+            <a:r>
+              <a:t>🎞  Claude 簡報</a:t>
+            </a:r>
+          </a:p>
+        </p:txBody>
+      </p:sp>
+      <p:sp>
+        <p:nvSpPr>
+          <p:cNvPr id="20" name="TextBox 19"/>
+          <p:cNvSpPr txBox="1"/>
+          <p:nvPr/>
+        </p:nvSpPr>
+        <p:spPr>
+          <a:xfrm>
+            <a:off x="6492240" y="4709160"/>
+            <a:ext cx="4846320" cy="457200"/>
+          </a:xfrm>
+          <a:prstGeom prst="rect">
+            <a:avLst/>
+          </a:prstGeom>
+          <a:noFill/>
+        </p:spPr>
+        <p:txBody>
+          <a:bodyPr wrap="square" lIns="0" rIns="0" tIns="0" bIns="0">
+            <a:spAutoFit/>
+          </a:bodyPr>
+          <a:lstStyle/>
+          <a:p>
+            <a:pPr algn="l">
+              <a:lnSpc>
+                <a:spcPct val="140000"/>
+              </a:lnSpc>
+              <a:defRPr sz="1500" b="0">
+                <a:solidFill>
+                  <a:srgbClr val="BBBBCC"/>
+                </a:solidFill>
+                <a:latin typeface="Helvetica Neue"/>
+              </a:defRPr>
+            </a:pPr>
+            <a:r>
+              <a:t>Step 5 路徑 B</a:t>
+            </a:r>
+          </a:p>
+        </p:txBody>
+      </p:sp>
+      <p:sp>
+        <p:nvSpPr>
+          <p:cNvPr id="21" name="Rectangle 20"/>
+          <p:cNvSpPr/>
+          <p:nvPr/>
+        </p:nvSpPr>
+        <p:spPr>
+          <a:xfrm>
+            <a:off x="731520" y="5760720"/>
+            <a:ext cx="10515600" cy="640080"/>
+          </a:xfrm>
+          <a:prstGeom prst="rect">
+            <a:avLst/>
+          </a:prstGeom>
+          <a:solidFill>
+            <a:srgbClr val="222B45"/>
+          </a:solidFill>
+          <a:ln>
+            <a:noFill/>
+          </a:ln>
+        </p:spPr>
+        <p:style>
+          <a:lnRef idx="1">
+            <a:schemeClr val="accent1"/>
+          </a:lnRef>
+          <a:fillRef idx="3">
+            <a:schemeClr val="accent1"/>
+          </a:fillRef>
+          <a:effectRef idx="2">
+            <a:schemeClr val="accent1"/>
+          </a:effectRef>
+          <a:fontRef idx="minor">
+            <a:schemeClr val="lt1"/>
+          </a:fontRef>
+        </p:style>
+        <p:txBody>
+          <a:bodyPr rtlCol="0" anchor="ctr"/>
+          <a:lstStyle/>
+          <a:p>
+            <a:pPr algn="ctr"/>
+          </a:p>
+        </p:txBody>
+      </p:sp>
+      <p:sp>
+        <p:nvSpPr>
+          <p:cNvPr id="22" name="Rectangle 21"/>
+          <p:cNvSpPr/>
+          <p:nvPr/>
+        </p:nvSpPr>
+        <p:spPr>
+          <a:xfrm>
+            <a:off x="731520" y="5760720"/>
+            <a:ext cx="63500" cy="640080"/>
           </a:xfrm>
           <a:prstGeom prst="rect">
             <a:avLst/>
@@ -22484,14 +23083,14 @@
       </p:sp>
       <p:sp>
         <p:nvSpPr>
-          <p:cNvPr id="14" name="TextBox 13"/>
+          <p:cNvPr id="23" name="TextBox 22"/>
           <p:cNvSpPr txBox="1"/>
           <p:nvPr/>
         </p:nvSpPr>
         <p:spPr>
           <a:xfrm>
-            <a:off x="914400" y="3328416"/>
-            <a:ext cx="914400" cy="365760"/>
+            <a:off x="914400" y="5943600"/>
+            <a:ext cx="10149840" cy="274320"/>
           </a:xfrm>
           <a:prstGeom prst="rect">
             <a:avLst/>
@@ -22508,507 +23107,15 @@
               <a:lnSpc>
                 <a:spcPct val="140000"/>
               </a:lnSpc>
-              <a:defRPr sz="2000" b="1">
-                <a:solidFill>
-                  <a:srgbClr val="4ECB71"/>
+              <a:defRPr sz="1500" b="0">
+                <a:solidFill>
+                  <a:srgbClr val="FFFFFF"/>
                 </a:solidFill>
                 <a:latin typeface="Helvetica Neue"/>
               </a:defRPr>
             </a:pPr>
             <a:r>
-              <a:t>學</a:t>
-            </a:r>
-          </a:p>
-        </p:txBody>
-      </p:sp>
-      <p:sp>
-        <p:nvSpPr>
-          <p:cNvPr id="15" name="TextBox 14"/>
-          <p:cNvSpPr txBox="1"/>
-          <p:nvPr/>
-        </p:nvSpPr>
-        <p:spPr>
-          <a:xfrm>
-            <a:off x="2011680" y="3346704"/>
-            <a:ext cx="9144000" cy="365760"/>
-          </a:xfrm>
-          <a:prstGeom prst="rect">
-            <a:avLst/>
-          </a:prstGeom>
-          <a:noFill/>
-        </p:spPr>
-        <p:txBody>
-          <a:bodyPr wrap="square" lIns="0" rIns="0" tIns="0" bIns="0">
-            <a:spAutoFit/>
-          </a:bodyPr>
-          <a:lstStyle/>
-          <a:p>
-            <a:pPr algn="l">
-              <a:lnSpc>
-                <a:spcPct val="140000"/>
-              </a:lnSpc>
-              <a:defRPr sz="1800" b="0">
-                <a:solidFill>
-                  <a:srgbClr val="FFFFFF"/>
-                </a:solidFill>
-                <a:latin typeface="Helvetica Neue"/>
-              </a:defRPr>
-            </a:pPr>
-            <a:r>
-              <a:t>來回三輪改出來的反思，更新進 Word 完成定稿</a:t>
-            </a:r>
-          </a:p>
-        </p:txBody>
-      </p:sp>
-      <p:sp>
-        <p:nvSpPr>
-          <p:cNvPr id="16" name="Rectangle 15"/>
-          <p:cNvSpPr/>
-          <p:nvPr/>
-        </p:nvSpPr>
-        <p:spPr>
-          <a:xfrm>
-            <a:off x="731520" y="3922776"/>
-            <a:ext cx="10515600" cy="594360"/>
-          </a:xfrm>
-          <a:prstGeom prst="rect">
-            <a:avLst/>
-          </a:prstGeom>
-          <a:solidFill>
-            <a:srgbClr val="222B45"/>
-          </a:solidFill>
-          <a:ln>
-            <a:noFill/>
-          </a:ln>
-        </p:spPr>
-        <p:style>
-          <a:lnRef idx="1">
-            <a:schemeClr val="accent1"/>
-          </a:lnRef>
-          <a:fillRef idx="3">
-            <a:schemeClr val="accent1"/>
-          </a:fillRef>
-          <a:effectRef idx="2">
-            <a:schemeClr val="accent1"/>
-          </a:effectRef>
-          <a:fontRef idx="minor">
-            <a:schemeClr val="lt1"/>
-          </a:fontRef>
-        </p:style>
-        <p:txBody>
-          <a:bodyPr rtlCol="0" anchor="ctr"/>
-          <a:lstStyle/>
-          <a:p>
-            <a:pPr algn="ctr"/>
-          </a:p>
-        </p:txBody>
-      </p:sp>
-      <p:sp>
-        <p:nvSpPr>
-          <p:cNvPr id="17" name="Rectangle 16"/>
-          <p:cNvSpPr/>
-          <p:nvPr/>
-        </p:nvSpPr>
-        <p:spPr>
-          <a:xfrm>
-            <a:off x="731520" y="3922776"/>
-            <a:ext cx="63500" cy="594360"/>
-          </a:xfrm>
-          <a:prstGeom prst="rect">
-            <a:avLst/>
-          </a:prstGeom>
-          <a:solidFill>
-            <a:srgbClr val="FFAA33"/>
-          </a:solidFill>
-          <a:ln>
-            <a:noFill/>
-          </a:ln>
-        </p:spPr>
-        <p:style>
-          <a:lnRef idx="1">
-            <a:schemeClr val="accent1"/>
-          </a:lnRef>
-          <a:fillRef idx="3">
-            <a:schemeClr val="accent1"/>
-          </a:fillRef>
-          <a:effectRef idx="2">
-            <a:schemeClr val="accent1"/>
-          </a:effectRef>
-          <a:fontRef idx="minor">
-            <a:schemeClr val="lt1"/>
-          </a:fontRef>
-        </p:style>
-        <p:txBody>
-          <a:bodyPr rtlCol="0" anchor="ctr"/>
-          <a:lstStyle/>
-          <a:p>
-            <a:pPr algn="ctr"/>
-          </a:p>
-        </p:txBody>
-      </p:sp>
-      <p:sp>
-        <p:nvSpPr>
-          <p:cNvPr id="18" name="TextBox 17"/>
-          <p:cNvSpPr txBox="1"/>
-          <p:nvPr/>
-        </p:nvSpPr>
-        <p:spPr>
-          <a:xfrm>
-            <a:off x="914400" y="4041648"/>
-            <a:ext cx="914400" cy="365760"/>
-          </a:xfrm>
-          <a:prstGeom prst="rect">
-            <a:avLst/>
-          </a:prstGeom>
-          <a:noFill/>
-        </p:spPr>
-        <p:txBody>
-          <a:bodyPr wrap="square" lIns="0" rIns="0" tIns="0" bIns="0">
-            <a:spAutoFit/>
-          </a:bodyPr>
-          <a:lstStyle/>
-          <a:p>
-            <a:pPr algn="l">
-              <a:lnSpc>
-                <a:spcPct val="140000"/>
-              </a:lnSpc>
-              <a:defRPr sz="2000" b="1">
-                <a:solidFill>
-                  <a:srgbClr val="FFAA33"/>
-                </a:solidFill>
-                <a:latin typeface="Helvetica Neue"/>
-              </a:defRPr>
-            </a:pPr>
-            <a:r>
-              <a:t>簡報</a:t>
-            </a:r>
-          </a:p>
-        </p:txBody>
-      </p:sp>
-      <p:sp>
-        <p:nvSpPr>
-          <p:cNvPr id="19" name="TextBox 18"/>
-          <p:cNvSpPr txBox="1"/>
-          <p:nvPr/>
-        </p:nvSpPr>
-        <p:spPr>
-          <a:xfrm>
-            <a:off x="2011680" y="4059936"/>
-            <a:ext cx="9144000" cy="365760"/>
-          </a:xfrm>
-          <a:prstGeom prst="rect">
-            <a:avLst/>
-          </a:prstGeom>
-          <a:noFill/>
-        </p:spPr>
-        <p:txBody>
-          <a:bodyPr wrap="square" lIns="0" rIns="0" tIns="0" bIns="0">
-            <a:spAutoFit/>
-          </a:bodyPr>
-          <a:lstStyle/>
-          <a:p>
-            <a:pPr algn="l">
-              <a:lnSpc>
-                <a:spcPct val="140000"/>
-              </a:lnSpc>
-              <a:defRPr sz="1800" b="0">
-                <a:solidFill>
-                  <a:srgbClr val="FFFFFF"/>
-                </a:solidFill>
-                <a:latin typeface="Helvetica Neue"/>
-              </a:defRPr>
-            </a:pPr>
-            <a:r>
-              <a:t>Gamma 或 Claude 生成的報告簡報</a:t>
-            </a:r>
-          </a:p>
-        </p:txBody>
-      </p:sp>
-      <p:sp>
-        <p:nvSpPr>
-          <p:cNvPr id="20" name="Rectangle 19"/>
-          <p:cNvSpPr/>
-          <p:nvPr/>
-        </p:nvSpPr>
-        <p:spPr>
-          <a:xfrm>
-            <a:off x="731520" y="4636008"/>
-            <a:ext cx="10515600" cy="594360"/>
-          </a:xfrm>
-          <a:prstGeom prst="rect">
-            <a:avLst/>
-          </a:prstGeom>
-          <a:solidFill>
-            <a:srgbClr val="222B45"/>
-          </a:solidFill>
-          <a:ln>
-            <a:noFill/>
-          </a:ln>
-        </p:spPr>
-        <p:style>
-          <a:lnRef idx="1">
-            <a:schemeClr val="accent1"/>
-          </a:lnRef>
-          <a:fillRef idx="3">
-            <a:schemeClr val="accent1"/>
-          </a:fillRef>
-          <a:effectRef idx="2">
-            <a:schemeClr val="accent1"/>
-          </a:effectRef>
-          <a:fontRef idx="minor">
-            <a:schemeClr val="lt1"/>
-          </a:fontRef>
-        </p:style>
-        <p:txBody>
-          <a:bodyPr rtlCol="0" anchor="ctr"/>
-          <a:lstStyle/>
-          <a:p>
-            <a:pPr algn="ctr"/>
-          </a:p>
-        </p:txBody>
-      </p:sp>
-      <p:sp>
-        <p:nvSpPr>
-          <p:cNvPr id="21" name="Rectangle 20"/>
-          <p:cNvSpPr/>
-          <p:nvPr/>
-        </p:nvSpPr>
-        <p:spPr>
-          <a:xfrm>
-            <a:off x="731520" y="4636008"/>
-            <a:ext cx="63500" cy="594360"/>
-          </a:xfrm>
-          <a:prstGeom prst="rect">
-            <a:avLst/>
-          </a:prstGeom>
-          <a:solidFill>
-            <a:srgbClr val="CC66FF"/>
-          </a:solidFill>
-          <a:ln>
-            <a:noFill/>
-          </a:ln>
-        </p:spPr>
-        <p:style>
-          <a:lnRef idx="1">
-            <a:schemeClr val="accent1"/>
-          </a:lnRef>
-          <a:fillRef idx="3">
-            <a:schemeClr val="accent1"/>
-          </a:fillRef>
-          <a:effectRef idx="2">
-            <a:schemeClr val="accent1"/>
-          </a:effectRef>
-          <a:fontRef idx="minor">
-            <a:schemeClr val="lt1"/>
-          </a:fontRef>
-        </p:style>
-        <p:txBody>
-          <a:bodyPr rtlCol="0" anchor="ctr"/>
-          <a:lstStyle/>
-          <a:p>
-            <a:pPr algn="ctr"/>
-          </a:p>
-        </p:txBody>
-      </p:sp>
-      <p:sp>
-        <p:nvSpPr>
-          <p:cNvPr id="22" name="TextBox 21"/>
-          <p:cNvSpPr txBox="1"/>
-          <p:nvPr/>
-        </p:nvSpPr>
-        <p:spPr>
-          <a:xfrm>
-            <a:off x="914400" y="4754880"/>
-            <a:ext cx="914400" cy="365760"/>
-          </a:xfrm>
-          <a:prstGeom prst="rect">
-            <a:avLst/>
-          </a:prstGeom>
-          <a:noFill/>
-        </p:spPr>
-        <p:txBody>
-          <a:bodyPr wrap="square" lIns="0" rIns="0" tIns="0" bIns="0">
-            <a:spAutoFit/>
-          </a:bodyPr>
-          <a:lstStyle/>
-          <a:p>
-            <a:pPr algn="l">
-              <a:lnSpc>
-                <a:spcPct val="140000"/>
-              </a:lnSpc>
-              <a:defRPr sz="2000" b="1">
-                <a:solidFill>
-                  <a:srgbClr val="CC66FF"/>
-                </a:solidFill>
-                <a:latin typeface="Helvetica Neue"/>
-              </a:defRPr>
-            </a:pPr>
-            <a:r>
-              <a:t>創造</a:t>
-            </a:r>
-          </a:p>
-        </p:txBody>
-      </p:sp>
-      <p:sp>
-        <p:nvSpPr>
-          <p:cNvPr id="23" name="TextBox 22"/>
-          <p:cNvSpPr txBox="1"/>
-          <p:nvPr/>
-        </p:nvSpPr>
-        <p:spPr>
-          <a:xfrm>
-            <a:off x="2011680" y="4773168"/>
-            <a:ext cx="9144000" cy="365760"/>
-          </a:xfrm>
-          <a:prstGeom prst="rect">
-            <a:avLst/>
-          </a:prstGeom>
-          <a:noFill/>
-        </p:spPr>
-        <p:txBody>
-          <a:bodyPr wrap="square" lIns="0" rIns="0" tIns="0" bIns="0">
-            <a:spAutoFit/>
-          </a:bodyPr>
-          <a:lstStyle/>
-          <a:p>
-            <a:pPr algn="l">
-              <a:lnSpc>
-                <a:spcPct val="140000"/>
-              </a:lnSpc>
-              <a:defRPr sz="1800" b="0">
-                <a:solidFill>
-                  <a:srgbClr val="FFFFFF"/>
-                </a:solidFill>
-                <a:latin typeface="Helvetica Neue"/>
-              </a:defRPr>
-            </a:pPr>
-            <a:r>
-              <a:t>（加分）互動時間軸網頁 + Ideogram 封面圖</a:t>
-            </a:r>
-          </a:p>
-        </p:txBody>
-      </p:sp>
-      <p:sp>
-        <p:nvSpPr>
-          <p:cNvPr id="24" name="Rectangle 23"/>
-          <p:cNvSpPr/>
-          <p:nvPr/>
-        </p:nvSpPr>
-        <p:spPr>
-          <a:xfrm>
-            <a:off x="731520" y="5577840"/>
-            <a:ext cx="10515600" cy="868680"/>
-          </a:xfrm>
-          <a:prstGeom prst="rect">
-            <a:avLst/>
-          </a:prstGeom>
-          <a:solidFill>
-            <a:srgbClr val="222B45"/>
-          </a:solidFill>
-          <a:ln>
-            <a:noFill/>
-          </a:ln>
-        </p:spPr>
-        <p:style>
-          <a:lnRef idx="1">
-            <a:schemeClr val="accent1"/>
-          </a:lnRef>
-          <a:fillRef idx="3">
-            <a:schemeClr val="accent1"/>
-          </a:fillRef>
-          <a:effectRef idx="2">
-            <a:schemeClr val="accent1"/>
-          </a:effectRef>
-          <a:fontRef idx="minor">
-            <a:schemeClr val="lt1"/>
-          </a:fontRef>
-        </p:style>
-        <p:txBody>
-          <a:bodyPr rtlCol="0" anchor="ctr"/>
-          <a:lstStyle/>
-          <a:p>
-            <a:pPr algn="ctr"/>
-          </a:p>
-        </p:txBody>
-      </p:sp>
-      <p:sp>
-        <p:nvSpPr>
-          <p:cNvPr id="25" name="Rectangle 24"/>
-          <p:cNvSpPr/>
-          <p:nvPr/>
-        </p:nvSpPr>
-        <p:spPr>
-          <a:xfrm>
-            <a:off x="731520" y="5577840"/>
-            <a:ext cx="63500" cy="868680"/>
-          </a:xfrm>
-          <a:prstGeom prst="rect">
-            <a:avLst/>
-          </a:prstGeom>
-          <a:solidFill>
-            <a:srgbClr val="4ECB71"/>
-          </a:solidFill>
-          <a:ln>
-            <a:noFill/>
-          </a:ln>
-        </p:spPr>
-        <p:style>
-          <a:lnRef idx="1">
-            <a:schemeClr val="accent1"/>
-          </a:lnRef>
-          <a:fillRef idx="3">
-            <a:schemeClr val="accent1"/>
-          </a:fillRef>
-          <a:effectRef idx="2">
-            <a:schemeClr val="accent1"/>
-          </a:effectRef>
-          <a:fontRef idx="minor">
-            <a:schemeClr val="lt1"/>
-          </a:fontRef>
-        </p:style>
-        <p:txBody>
-          <a:bodyPr rtlCol="0" anchor="ctr"/>
-          <a:lstStyle/>
-          <a:p>
-            <a:pPr algn="ctr"/>
-          </a:p>
-        </p:txBody>
-      </p:sp>
-      <p:sp>
-        <p:nvSpPr>
-          <p:cNvPr id="26" name="TextBox 25"/>
-          <p:cNvSpPr txBox="1"/>
-          <p:nvPr/>
-        </p:nvSpPr>
-        <p:spPr>
-          <a:xfrm>
-            <a:off x="914400" y="5760720"/>
-            <a:ext cx="10149840" cy="502920"/>
-          </a:xfrm>
-          <a:prstGeom prst="rect">
-            <a:avLst/>
-          </a:prstGeom>
-          <a:noFill/>
-        </p:spPr>
-        <p:txBody>
-          <a:bodyPr wrap="square" lIns="0" rIns="0" tIns="0" bIns="0">
-            <a:spAutoFit/>
-          </a:bodyPr>
-          <a:lstStyle/>
-          <a:p>
-            <a:pPr algn="l">
-              <a:lnSpc>
-                <a:spcPct val="140000"/>
-              </a:lnSpc>
-              <a:defRPr sz="1700" b="0">
-                <a:solidFill>
-                  <a:srgbClr val="FFFFFF"/>
-                </a:solidFill>
-                <a:latin typeface="Helvetica Neue"/>
-              </a:defRPr>
-            </a:pPr>
-            <a:r>
-              <a:t>三小時前你還在煩惱學習歷程——現在你手上有 Word + 簡報，可能還有互動網頁</a:t>
+              <a:t>三小時後，你手上也會有類似的東西——而且是你自己選的題目、你自己的口吻</a:t>
             </a:r>
           </a:p>
         </p:txBody>
@@ -23073,7 +23180,7 @@
               </a:defRPr>
             </a:pPr>
             <a:r>
-              <a:t>老師示範：跑完流程長這樣</a:t>
+              <a:t>三個帶走的觀念</a:t>
             </a:r>
           </a:p>
         </p:txBody>
@@ -23088,6 +23195,524 @@
           <a:xfrm>
             <a:off x="731520" y="1325880"/>
             <a:ext cx="10515600" cy="25400"/>
+          </a:xfrm>
+          <a:prstGeom prst="rect">
+            <a:avLst/>
+          </a:prstGeom>
+          <a:solidFill>
+            <a:srgbClr val="00D2FF"/>
+          </a:solidFill>
+          <a:ln>
+            <a:noFill/>
+          </a:ln>
+        </p:spPr>
+        <p:style>
+          <a:lnRef idx="1">
+            <a:schemeClr val="accent1"/>
+          </a:lnRef>
+          <a:fillRef idx="3">
+            <a:schemeClr val="accent1"/>
+          </a:fillRef>
+          <a:effectRef idx="2">
+            <a:schemeClr val="accent1"/>
+          </a:effectRef>
+          <a:fontRef idx="minor">
+            <a:schemeClr val="lt1"/>
+          </a:fontRef>
+        </p:style>
+        <p:txBody>
+          <a:bodyPr rtlCol="0" anchor="ctr"/>
+          <a:lstStyle/>
+          <a:p>
+            <a:pPr algn="ctr"/>
+          </a:p>
+        </p:txBody>
+      </p:sp>
+      <p:sp>
+        <p:nvSpPr>
+          <p:cNvPr id="4" name="Rectangle 3"/>
+          <p:cNvSpPr/>
+          <p:nvPr/>
+        </p:nvSpPr>
+        <p:spPr>
+          <a:xfrm>
+            <a:off x="731520" y="1828800"/>
+            <a:ext cx="10515600" cy="1188720"/>
+          </a:xfrm>
+          <a:prstGeom prst="rect">
+            <a:avLst/>
+          </a:prstGeom>
+          <a:solidFill>
+            <a:srgbClr val="222B45"/>
+          </a:solidFill>
+          <a:ln>
+            <a:noFill/>
+          </a:ln>
+        </p:spPr>
+        <p:style>
+          <a:lnRef idx="1">
+            <a:schemeClr val="accent1"/>
+          </a:lnRef>
+          <a:fillRef idx="3">
+            <a:schemeClr val="accent1"/>
+          </a:fillRef>
+          <a:effectRef idx="2">
+            <a:schemeClr val="accent1"/>
+          </a:effectRef>
+          <a:fontRef idx="minor">
+            <a:schemeClr val="lt1"/>
+          </a:fontRef>
+        </p:style>
+        <p:txBody>
+          <a:bodyPr rtlCol="0" anchor="ctr"/>
+          <a:lstStyle/>
+          <a:p>
+            <a:pPr algn="ctr"/>
+          </a:p>
+        </p:txBody>
+      </p:sp>
+      <p:sp>
+        <p:nvSpPr>
+          <p:cNvPr id="5" name="Rectangle 4"/>
+          <p:cNvSpPr/>
+          <p:nvPr/>
+        </p:nvSpPr>
+        <p:spPr>
+          <a:xfrm>
+            <a:off x="731520" y="1828800"/>
+            <a:ext cx="63500" cy="1188720"/>
+          </a:xfrm>
+          <a:prstGeom prst="rect">
+            <a:avLst/>
+          </a:prstGeom>
+          <a:solidFill>
+            <a:srgbClr val="00D2FF"/>
+          </a:solidFill>
+          <a:ln>
+            <a:noFill/>
+          </a:ln>
+        </p:spPr>
+        <p:style>
+          <a:lnRef idx="1">
+            <a:schemeClr val="accent1"/>
+          </a:lnRef>
+          <a:fillRef idx="3">
+            <a:schemeClr val="accent1"/>
+          </a:fillRef>
+          <a:effectRef idx="2">
+            <a:schemeClr val="accent1"/>
+          </a:effectRef>
+          <a:fontRef idx="minor">
+            <a:schemeClr val="lt1"/>
+          </a:fontRef>
+        </p:style>
+        <p:txBody>
+          <a:bodyPr rtlCol="0" anchor="ctr"/>
+          <a:lstStyle/>
+          <a:p>
+            <a:pPr algn="ctr"/>
+          </a:p>
+        </p:txBody>
+      </p:sp>
+      <p:sp>
+        <p:nvSpPr>
+          <p:cNvPr id="6" name="Oval 5"/>
+          <p:cNvSpPr/>
+          <p:nvPr/>
+        </p:nvSpPr>
+        <p:spPr>
+          <a:xfrm>
+            <a:off x="1005840" y="2103120"/>
+            <a:ext cx="640080" cy="640080"/>
+          </a:xfrm>
+          <a:prstGeom prst="ellipse">
+            <a:avLst/>
+          </a:prstGeom>
+          <a:solidFill>
+            <a:srgbClr val="00D2FF"/>
+          </a:solidFill>
+          <a:ln>
+            <a:noFill/>
+          </a:ln>
+        </p:spPr>
+        <p:style>
+          <a:lnRef idx="1">
+            <a:schemeClr val="accent1"/>
+          </a:lnRef>
+          <a:fillRef idx="3">
+            <a:schemeClr val="accent1"/>
+          </a:fillRef>
+          <a:effectRef idx="2">
+            <a:schemeClr val="accent1"/>
+          </a:effectRef>
+          <a:fontRef idx="minor">
+            <a:schemeClr val="lt1"/>
+          </a:fontRef>
+        </p:style>
+        <p:txBody>
+          <a:bodyPr rtlCol="0" anchor="ctr" lIns="0" rIns="0" tIns="0" bIns="0"/>
+          <a:lstStyle/>
+          <a:p>
+            <a:pPr algn="ctr">
+              <a:defRPr sz="2800" b="1">
+                <a:solidFill>
+                  <a:srgbClr val="FFFFFF"/>
+                </a:solidFill>
+              </a:defRPr>
+            </a:pPr>
+            <a:r>
+              <a:t>1</a:t>
+            </a:r>
+          </a:p>
+        </p:txBody>
+      </p:sp>
+      <p:sp>
+        <p:nvSpPr>
+          <p:cNvPr id="7" name="TextBox 6"/>
+          <p:cNvSpPr txBox="1"/>
+          <p:nvPr/>
+        </p:nvSpPr>
+        <p:spPr>
+          <a:xfrm>
+            <a:off x="1920240" y="2011680"/>
+            <a:ext cx="9144000" cy="548640"/>
+          </a:xfrm>
+          <a:prstGeom prst="rect">
+            <a:avLst/>
+          </a:prstGeom>
+          <a:noFill/>
+        </p:spPr>
+        <p:txBody>
+          <a:bodyPr wrap="square" lIns="0" rIns="0" tIns="0" bIns="0">
+            <a:spAutoFit/>
+          </a:bodyPr>
+          <a:lstStyle/>
+          <a:p>
+            <a:pPr algn="l">
+              <a:lnSpc>
+                <a:spcPct val="140000"/>
+              </a:lnSpc>
+              <a:defRPr sz="2400" b="1">
+                <a:solidFill>
+                  <a:srgbClr val="FFFFFF"/>
+                </a:solidFill>
+                <a:latin typeface="Helvetica Neue"/>
+              </a:defRPr>
+            </a:pPr>
+            <a:r>
+              <a:t>AI 幫你加速，不是幫你代寫</a:t>
+            </a:r>
+          </a:p>
+        </p:txBody>
+      </p:sp>
+      <p:sp>
+        <p:nvSpPr>
+          <p:cNvPr id="8" name="TextBox 7"/>
+          <p:cNvSpPr txBox="1"/>
+          <p:nvPr/>
+        </p:nvSpPr>
+        <p:spPr>
+          <a:xfrm>
+            <a:off x="1920240" y="2514600"/>
+            <a:ext cx="9144000" cy="365760"/>
+          </a:xfrm>
+          <a:prstGeom prst="rect">
+            <a:avLst/>
+          </a:prstGeom>
+          <a:noFill/>
+        </p:spPr>
+        <p:txBody>
+          <a:bodyPr wrap="square" lIns="0" rIns="0" tIns="0" bIns="0">
+            <a:spAutoFit/>
+          </a:bodyPr>
+          <a:lstStyle/>
+          <a:p>
+            <a:pPr algn="l">
+              <a:lnSpc>
+                <a:spcPct val="140000"/>
+              </a:lnSpc>
+              <a:defRPr sz="1600" b="0">
+                <a:solidFill>
+                  <a:srgbClr val="BBBBCC"/>
+                </a:solidFill>
+                <a:latin typeface="Helvetica Neue"/>
+              </a:defRPr>
+            </a:pPr>
+            <a:r>
+              <a:t>最後掛名的是你</a:t>
+            </a:r>
+          </a:p>
+        </p:txBody>
+      </p:sp>
+      <p:sp>
+        <p:nvSpPr>
+          <p:cNvPr id="9" name="Rectangle 8"/>
+          <p:cNvSpPr/>
+          <p:nvPr/>
+        </p:nvSpPr>
+        <p:spPr>
+          <a:xfrm>
+            <a:off x="731520" y="3246120"/>
+            <a:ext cx="10515600" cy="1188720"/>
+          </a:xfrm>
+          <a:prstGeom prst="rect">
+            <a:avLst/>
+          </a:prstGeom>
+          <a:solidFill>
+            <a:srgbClr val="222B45"/>
+          </a:solidFill>
+          <a:ln>
+            <a:noFill/>
+          </a:ln>
+        </p:spPr>
+        <p:style>
+          <a:lnRef idx="1">
+            <a:schemeClr val="accent1"/>
+          </a:lnRef>
+          <a:fillRef idx="3">
+            <a:schemeClr val="accent1"/>
+          </a:fillRef>
+          <a:effectRef idx="2">
+            <a:schemeClr val="accent1"/>
+          </a:effectRef>
+          <a:fontRef idx="minor">
+            <a:schemeClr val="lt1"/>
+          </a:fontRef>
+        </p:style>
+        <p:txBody>
+          <a:bodyPr rtlCol="0" anchor="ctr"/>
+          <a:lstStyle/>
+          <a:p>
+            <a:pPr algn="ctr"/>
+          </a:p>
+        </p:txBody>
+      </p:sp>
+      <p:sp>
+        <p:nvSpPr>
+          <p:cNvPr id="10" name="Rectangle 9"/>
+          <p:cNvSpPr/>
+          <p:nvPr/>
+        </p:nvSpPr>
+        <p:spPr>
+          <a:xfrm>
+            <a:off x="731520" y="3246120"/>
+            <a:ext cx="63500" cy="1188720"/>
+          </a:xfrm>
+          <a:prstGeom prst="rect">
+            <a:avLst/>
+          </a:prstGeom>
+          <a:solidFill>
+            <a:srgbClr val="FFAA33"/>
+          </a:solidFill>
+          <a:ln>
+            <a:noFill/>
+          </a:ln>
+        </p:spPr>
+        <p:style>
+          <a:lnRef idx="1">
+            <a:schemeClr val="accent1"/>
+          </a:lnRef>
+          <a:fillRef idx="3">
+            <a:schemeClr val="accent1"/>
+          </a:fillRef>
+          <a:effectRef idx="2">
+            <a:schemeClr val="accent1"/>
+          </a:effectRef>
+          <a:fontRef idx="minor">
+            <a:schemeClr val="lt1"/>
+          </a:fontRef>
+        </p:style>
+        <p:txBody>
+          <a:bodyPr rtlCol="0" anchor="ctr"/>
+          <a:lstStyle/>
+          <a:p>
+            <a:pPr algn="ctr"/>
+          </a:p>
+        </p:txBody>
+      </p:sp>
+      <p:sp>
+        <p:nvSpPr>
+          <p:cNvPr id="11" name="Oval 10"/>
+          <p:cNvSpPr/>
+          <p:nvPr/>
+        </p:nvSpPr>
+        <p:spPr>
+          <a:xfrm>
+            <a:off x="1005840" y="3520440"/>
+            <a:ext cx="640080" cy="640080"/>
+          </a:xfrm>
+          <a:prstGeom prst="ellipse">
+            <a:avLst/>
+          </a:prstGeom>
+          <a:solidFill>
+            <a:srgbClr val="FFAA33"/>
+          </a:solidFill>
+          <a:ln>
+            <a:noFill/>
+          </a:ln>
+        </p:spPr>
+        <p:style>
+          <a:lnRef idx="1">
+            <a:schemeClr val="accent1"/>
+          </a:lnRef>
+          <a:fillRef idx="3">
+            <a:schemeClr val="accent1"/>
+          </a:fillRef>
+          <a:effectRef idx="2">
+            <a:schemeClr val="accent1"/>
+          </a:effectRef>
+          <a:fontRef idx="minor">
+            <a:schemeClr val="lt1"/>
+          </a:fontRef>
+        </p:style>
+        <p:txBody>
+          <a:bodyPr rtlCol="0" anchor="ctr" lIns="0" rIns="0" tIns="0" bIns="0"/>
+          <a:lstStyle/>
+          <a:p>
+            <a:pPr algn="ctr">
+              <a:defRPr sz="2800" b="1">
+                <a:solidFill>
+                  <a:srgbClr val="FFFFFF"/>
+                </a:solidFill>
+              </a:defRPr>
+            </a:pPr>
+            <a:r>
+              <a:t>2</a:t>
+            </a:r>
+          </a:p>
+        </p:txBody>
+      </p:sp>
+      <p:sp>
+        <p:nvSpPr>
+          <p:cNvPr id="12" name="TextBox 11"/>
+          <p:cNvSpPr txBox="1"/>
+          <p:nvPr/>
+        </p:nvSpPr>
+        <p:spPr>
+          <a:xfrm>
+            <a:off x="1920240" y="3429000"/>
+            <a:ext cx="9144000" cy="548640"/>
+          </a:xfrm>
+          <a:prstGeom prst="rect">
+            <a:avLst/>
+          </a:prstGeom>
+          <a:noFill/>
+        </p:spPr>
+        <p:txBody>
+          <a:bodyPr wrap="square" lIns="0" rIns="0" tIns="0" bIns="0">
+            <a:spAutoFit/>
+          </a:bodyPr>
+          <a:lstStyle/>
+          <a:p>
+            <a:pPr algn="l">
+              <a:lnSpc>
+                <a:spcPct val="140000"/>
+              </a:lnSpc>
+              <a:defRPr sz="2400" b="1">
+                <a:solidFill>
+                  <a:srgbClr val="FFFFFF"/>
+                </a:solidFill>
+                <a:latin typeface="Helvetica Neue"/>
+              </a:defRPr>
+            </a:pPr>
+            <a:r>
+              <a:t>好 prompt 比好工具重要</a:t>
+            </a:r>
+          </a:p>
+        </p:txBody>
+      </p:sp>
+      <p:sp>
+        <p:nvSpPr>
+          <p:cNvPr id="13" name="TextBox 12"/>
+          <p:cNvSpPr txBox="1"/>
+          <p:nvPr/>
+        </p:nvSpPr>
+        <p:spPr>
+          <a:xfrm>
+            <a:off x="1920240" y="3931920"/>
+            <a:ext cx="9144000" cy="365760"/>
+          </a:xfrm>
+          <a:prstGeom prst="rect">
+            <a:avLst/>
+          </a:prstGeom>
+          <a:noFill/>
+        </p:spPr>
+        <p:txBody>
+          <a:bodyPr wrap="square" lIns="0" rIns="0" tIns="0" bIns="0">
+            <a:spAutoFit/>
+          </a:bodyPr>
+          <a:lstStyle/>
+          <a:p>
+            <a:pPr algn="l">
+              <a:lnSpc>
+                <a:spcPct val="140000"/>
+              </a:lnSpc>
+              <a:defRPr sz="1600" b="0">
+                <a:solidFill>
+                  <a:srgbClr val="BBBBCC"/>
+                </a:solidFill>
+                <a:latin typeface="Helvetica Neue"/>
+              </a:defRPr>
+            </a:pPr>
+            <a:r>
+              <a:t>你給 AI 多少「你的樣子」，它就回給你多少</a:t>
+            </a:r>
+          </a:p>
+        </p:txBody>
+      </p:sp>
+      <p:sp>
+        <p:nvSpPr>
+          <p:cNvPr id="14" name="Rectangle 13"/>
+          <p:cNvSpPr/>
+          <p:nvPr/>
+        </p:nvSpPr>
+        <p:spPr>
+          <a:xfrm>
+            <a:off x="731520" y="4663440"/>
+            <a:ext cx="10515600" cy="1188720"/>
+          </a:xfrm>
+          <a:prstGeom prst="rect">
+            <a:avLst/>
+          </a:prstGeom>
+          <a:solidFill>
+            <a:srgbClr val="222B45"/>
+          </a:solidFill>
+          <a:ln>
+            <a:noFill/>
+          </a:ln>
+        </p:spPr>
+        <p:style>
+          <a:lnRef idx="1">
+            <a:schemeClr val="accent1"/>
+          </a:lnRef>
+          <a:fillRef idx="3">
+            <a:schemeClr val="accent1"/>
+          </a:fillRef>
+          <a:effectRef idx="2">
+            <a:schemeClr val="accent1"/>
+          </a:effectRef>
+          <a:fontRef idx="minor">
+            <a:schemeClr val="lt1"/>
+          </a:fontRef>
+        </p:style>
+        <p:txBody>
+          <a:bodyPr rtlCol="0" anchor="ctr"/>
+          <a:lstStyle/>
+          <a:p>
+            <a:pPr algn="ctr"/>
+          </a:p>
+        </p:txBody>
+      </p:sp>
+      <p:sp>
+        <p:nvSpPr>
+          <p:cNvPr id="15" name="Rectangle 14"/>
+          <p:cNvSpPr/>
+          <p:nvPr/>
+        </p:nvSpPr>
+        <p:spPr>
+          <a:xfrm>
+            <a:off x="731520" y="4663440"/>
+            <a:ext cx="63500" cy="1188720"/>
           </a:xfrm>
           <a:prstGeom prst="rect">
             <a:avLst/>
@@ -23123,426 +23748,16 @@
       </p:sp>
       <p:sp>
         <p:nvSpPr>
-          <p:cNvPr id="4" name="TextBox 3"/>
-          <p:cNvSpPr txBox="1"/>
-          <p:nvPr/>
-        </p:nvSpPr>
-        <p:spPr>
-          <a:xfrm>
-            <a:off x="731520" y="1691640"/>
-            <a:ext cx="10515600" cy="457200"/>
-          </a:xfrm>
-          <a:prstGeom prst="rect">
-            <a:avLst/>
-          </a:prstGeom>
-          <a:noFill/>
-        </p:spPr>
-        <p:txBody>
-          <a:bodyPr wrap="square" lIns="0" rIns="0" tIns="0" bIns="0">
-            <a:spAutoFit/>
-          </a:bodyPr>
-          <a:lstStyle/>
-          <a:p>
-            <a:pPr algn="l">
-              <a:lnSpc>
-                <a:spcPct val="140000"/>
-              </a:lnSpc>
-              <a:defRPr sz="2000" b="0">
-                <a:solidFill>
-                  <a:srgbClr val="BBBBCC"/>
-                </a:solidFill>
-                <a:latin typeface="Helvetica Neue"/>
-              </a:defRPr>
-            </a:pPr>
-            <a:r>
-              <a:t>以「為什麼是雲林？」為題跑完整套流程，產出：</a:t>
-            </a:r>
-          </a:p>
-        </p:txBody>
-      </p:sp>
-      <p:sp>
-        <p:nvSpPr>
-          <p:cNvPr id="5" name="Rectangle 4"/>
+          <p:cNvPr id="16" name="Oval 15"/>
           <p:cNvSpPr/>
           <p:nvPr/>
         </p:nvSpPr>
         <p:spPr>
           <a:xfrm>
-            <a:off x="731520" y="2377440"/>
-            <a:ext cx="5212080" cy="1371600"/>
-          </a:xfrm>
-          <a:prstGeom prst="rect">
-            <a:avLst/>
-          </a:prstGeom>
-          <a:solidFill>
-            <a:srgbClr val="222B45"/>
-          </a:solidFill>
-          <a:ln>
-            <a:noFill/>
-          </a:ln>
-        </p:spPr>
-        <p:style>
-          <a:lnRef idx="1">
-            <a:schemeClr val="accent1"/>
-          </a:lnRef>
-          <a:fillRef idx="3">
-            <a:schemeClr val="accent1"/>
-          </a:fillRef>
-          <a:effectRef idx="2">
-            <a:schemeClr val="accent1"/>
-          </a:effectRef>
-          <a:fontRef idx="minor">
-            <a:schemeClr val="lt1"/>
-          </a:fontRef>
-        </p:style>
-        <p:txBody>
-          <a:bodyPr rtlCol="0" anchor="ctr"/>
-          <a:lstStyle/>
-          <a:p>
-            <a:pPr algn="ctr"/>
-          </a:p>
-        </p:txBody>
-      </p:sp>
-      <p:sp>
-        <p:nvSpPr>
-          <p:cNvPr id="6" name="Rectangle 5"/>
-          <p:cNvSpPr/>
-          <p:nvPr/>
-        </p:nvSpPr>
-        <p:spPr>
-          <a:xfrm>
-            <a:off x="731520" y="2377440"/>
-            <a:ext cx="5212080" cy="50800"/>
-          </a:xfrm>
-          <a:prstGeom prst="rect">
-            <a:avLst/>
-          </a:prstGeom>
-          <a:solidFill>
-            <a:srgbClr val="00D2FF"/>
-          </a:solidFill>
-          <a:ln>
-            <a:noFill/>
-          </a:ln>
-        </p:spPr>
-        <p:style>
-          <a:lnRef idx="1">
-            <a:schemeClr val="accent1"/>
-          </a:lnRef>
-          <a:fillRef idx="3">
-            <a:schemeClr val="accent1"/>
-          </a:fillRef>
-          <a:effectRef idx="2">
-            <a:schemeClr val="accent1"/>
-          </a:effectRef>
-          <a:fontRef idx="minor">
-            <a:schemeClr val="lt1"/>
-          </a:fontRef>
-        </p:style>
-        <p:txBody>
-          <a:bodyPr rtlCol="0" anchor="ctr"/>
-          <a:lstStyle/>
-          <a:p>
-            <a:pPr algn="ctr"/>
-          </a:p>
-        </p:txBody>
-      </p:sp>
-      <p:sp>
-        <p:nvSpPr>
-          <p:cNvPr id="7" name="TextBox 6"/>
-          <p:cNvSpPr txBox="1"/>
-          <p:nvPr/>
-        </p:nvSpPr>
-        <p:spPr>
-          <a:xfrm>
-            <a:off x="1005840" y="2606040"/>
-            <a:ext cx="4846320" cy="457200"/>
-          </a:xfrm>
-          <a:prstGeom prst="rect">
-            <a:avLst/>
-          </a:prstGeom>
-          <a:noFill/>
-        </p:spPr>
-        <p:txBody>
-          <a:bodyPr wrap="square" lIns="0" rIns="0" tIns="0" bIns="0">
-            <a:spAutoFit/>
-          </a:bodyPr>
-          <a:lstStyle/>
-          <a:p>
-            <a:pPr algn="l">
-              <a:lnSpc>
-                <a:spcPct val="140000"/>
-              </a:lnSpc>
-              <a:defRPr sz="2200" b="1">
-                <a:solidFill>
-                  <a:srgbClr val="FFFFFF"/>
-                </a:solidFill>
-                <a:latin typeface="Helvetica Neue"/>
-              </a:defRPr>
-            </a:pPr>
-            <a:r>
-              <a:t>⏱  互動時間軸</a:t>
-            </a:r>
-          </a:p>
-        </p:txBody>
-      </p:sp>
-      <p:sp>
-        <p:nvSpPr>
-          <p:cNvPr id="8" name="TextBox 7"/>
-          <p:cNvSpPr txBox="1"/>
-          <p:nvPr/>
-        </p:nvSpPr>
-        <p:spPr>
-          <a:xfrm>
-            <a:off x="1005840" y="3154680"/>
-            <a:ext cx="4846320" cy="457200"/>
-          </a:xfrm>
-          <a:prstGeom prst="rect">
-            <a:avLst/>
-          </a:prstGeom>
-          <a:noFill/>
-        </p:spPr>
-        <p:txBody>
-          <a:bodyPr wrap="square" lIns="0" rIns="0" tIns="0" bIns="0">
-            <a:spAutoFit/>
-          </a:bodyPr>
-          <a:lstStyle/>
-          <a:p>
-            <a:pPr algn="l">
-              <a:lnSpc>
-                <a:spcPct val="140000"/>
-              </a:lnSpc>
-              <a:defRPr sz="1500" b="0">
-                <a:solidFill>
-                  <a:srgbClr val="BBBBCC"/>
-                </a:solidFill>
-                <a:latin typeface="Helvetica Neue"/>
-              </a:defRPr>
-            </a:pPr>
-            <a:r>
-              <a:t>虎尾糖廠時間軸.html</a:t>
-            </a:r>
-          </a:p>
-        </p:txBody>
-      </p:sp>
-      <p:sp>
-        <p:nvSpPr>
-          <p:cNvPr id="9" name="Rectangle 8"/>
-          <p:cNvSpPr/>
-          <p:nvPr/>
-        </p:nvSpPr>
-        <p:spPr>
-          <a:xfrm>
-            <a:off x="6217920" y="2377440"/>
-            <a:ext cx="5212080" cy="1371600"/>
-          </a:xfrm>
-          <a:prstGeom prst="rect">
-            <a:avLst/>
-          </a:prstGeom>
-          <a:solidFill>
-            <a:srgbClr val="222B45"/>
-          </a:solidFill>
-          <a:ln>
-            <a:noFill/>
-          </a:ln>
-        </p:spPr>
-        <p:style>
-          <a:lnRef idx="1">
-            <a:schemeClr val="accent1"/>
-          </a:lnRef>
-          <a:fillRef idx="3">
-            <a:schemeClr val="accent1"/>
-          </a:fillRef>
-          <a:effectRef idx="2">
-            <a:schemeClr val="accent1"/>
-          </a:effectRef>
-          <a:fontRef idx="minor">
-            <a:schemeClr val="lt1"/>
-          </a:fontRef>
-        </p:style>
-        <p:txBody>
-          <a:bodyPr rtlCol="0" anchor="ctr"/>
-          <a:lstStyle/>
-          <a:p>
-            <a:pPr algn="ctr"/>
-          </a:p>
-        </p:txBody>
-      </p:sp>
-      <p:sp>
-        <p:nvSpPr>
-          <p:cNvPr id="10" name="Rectangle 9"/>
-          <p:cNvSpPr/>
-          <p:nvPr/>
-        </p:nvSpPr>
-        <p:spPr>
-          <a:xfrm>
-            <a:off x="6217920" y="2377440"/>
-            <a:ext cx="5212080" cy="50800"/>
-          </a:xfrm>
-          <a:prstGeom prst="rect">
-            <a:avLst/>
-          </a:prstGeom>
-          <a:solidFill>
-            <a:srgbClr val="FFAA33"/>
-          </a:solidFill>
-          <a:ln>
-            <a:noFill/>
-          </a:ln>
-        </p:spPr>
-        <p:style>
-          <a:lnRef idx="1">
-            <a:schemeClr val="accent1"/>
-          </a:lnRef>
-          <a:fillRef idx="3">
-            <a:schemeClr val="accent1"/>
-          </a:fillRef>
-          <a:effectRef idx="2">
-            <a:schemeClr val="accent1"/>
-          </a:effectRef>
-          <a:fontRef idx="minor">
-            <a:schemeClr val="lt1"/>
-          </a:fontRef>
-        </p:style>
-        <p:txBody>
-          <a:bodyPr rtlCol="0" anchor="ctr"/>
-          <a:lstStyle/>
-          <a:p>
-            <a:pPr algn="ctr"/>
-          </a:p>
-        </p:txBody>
-      </p:sp>
-      <p:sp>
-        <p:nvSpPr>
-          <p:cNvPr id="11" name="TextBox 10"/>
-          <p:cNvSpPr txBox="1"/>
-          <p:nvPr/>
-        </p:nvSpPr>
-        <p:spPr>
-          <a:xfrm>
-            <a:off x="6492240" y="2606040"/>
-            <a:ext cx="4846320" cy="457200"/>
-          </a:xfrm>
-          <a:prstGeom prst="rect">
-            <a:avLst/>
-          </a:prstGeom>
-          <a:noFill/>
-        </p:spPr>
-        <p:txBody>
-          <a:bodyPr wrap="square" lIns="0" rIns="0" tIns="0" bIns="0">
-            <a:spAutoFit/>
-          </a:bodyPr>
-          <a:lstStyle/>
-          <a:p>
-            <a:pPr algn="l">
-              <a:lnSpc>
-                <a:spcPct val="140000"/>
-              </a:lnSpc>
-              <a:defRPr sz="2200" b="1">
-                <a:solidFill>
-                  <a:srgbClr val="FFFFFF"/>
-                </a:solidFill>
-                <a:latin typeface="Helvetica Neue"/>
-              </a:defRPr>
-            </a:pPr>
-            <a:r>
-              <a:t>📄  小論文 Word 檔</a:t>
-            </a:r>
-          </a:p>
-        </p:txBody>
-      </p:sp>
-      <p:sp>
-        <p:nvSpPr>
-          <p:cNvPr id="12" name="TextBox 11"/>
-          <p:cNvSpPr txBox="1"/>
-          <p:nvPr/>
-        </p:nvSpPr>
-        <p:spPr>
-          <a:xfrm>
-            <a:off x="6492240" y="3154680"/>
-            <a:ext cx="4846320" cy="457200"/>
-          </a:xfrm>
-          <a:prstGeom prst="rect">
-            <a:avLst/>
-          </a:prstGeom>
-          <a:noFill/>
-        </p:spPr>
-        <p:txBody>
-          <a:bodyPr wrap="square" lIns="0" rIns="0" tIns="0" bIns="0">
-            <a:spAutoFit/>
-          </a:bodyPr>
-          <a:lstStyle/>
-          <a:p>
-            <a:pPr algn="l">
-              <a:lnSpc>
-                <a:spcPct val="140000"/>
-              </a:lnSpc>
-              <a:defRPr sz="1500" b="0">
-                <a:solidFill>
-                  <a:srgbClr val="BBBBCC"/>
-                </a:solidFill>
-                <a:latin typeface="Helvetica Neue"/>
-              </a:defRPr>
-            </a:pPr>
-            <a:r>
-              <a:t>Step 3 + 4 定稿</a:t>
-            </a:r>
-          </a:p>
-        </p:txBody>
-      </p:sp>
-      <p:sp>
-        <p:nvSpPr>
-          <p:cNvPr id="13" name="Rectangle 12"/>
-          <p:cNvSpPr/>
-          <p:nvPr/>
-        </p:nvSpPr>
-        <p:spPr>
-          <a:xfrm>
-            <a:off x="731520" y="3931920"/>
-            <a:ext cx="5212080" cy="1371600"/>
-          </a:xfrm>
-          <a:prstGeom prst="rect">
-            <a:avLst/>
-          </a:prstGeom>
-          <a:solidFill>
-            <a:srgbClr val="222B45"/>
-          </a:solidFill>
-          <a:ln>
-            <a:noFill/>
-          </a:ln>
-        </p:spPr>
-        <p:style>
-          <a:lnRef idx="1">
-            <a:schemeClr val="accent1"/>
-          </a:lnRef>
-          <a:fillRef idx="3">
-            <a:schemeClr val="accent1"/>
-          </a:fillRef>
-          <a:effectRef idx="2">
-            <a:schemeClr val="accent1"/>
-          </a:effectRef>
-          <a:fontRef idx="minor">
-            <a:schemeClr val="lt1"/>
-          </a:fontRef>
-        </p:style>
-        <p:txBody>
-          <a:bodyPr rtlCol="0" anchor="ctr"/>
-          <a:lstStyle/>
-          <a:p>
-            <a:pPr algn="ctr"/>
-          </a:p>
-        </p:txBody>
-      </p:sp>
-      <p:sp>
-        <p:nvSpPr>
-          <p:cNvPr id="14" name="Rectangle 13"/>
-          <p:cNvSpPr/>
-          <p:nvPr/>
-        </p:nvSpPr>
-        <p:spPr>
-          <a:xfrm>
-            <a:off x="731520" y="3931920"/>
-            <a:ext cx="5212080" cy="50800"/>
-          </a:xfrm>
-          <a:prstGeom prst="rect">
+            <a:off x="1005840" y="4937760"/>
+            <a:ext cx="640080" cy="640080"/>
+          </a:xfrm>
+          <a:prstGeom prst="ellipse">
             <a:avLst/>
           </a:prstGeom>
           <a:solidFill>
@@ -23567,23 +23782,32 @@
           </a:fontRef>
         </p:style>
         <p:txBody>
-          <a:bodyPr rtlCol="0" anchor="ctr"/>
-          <a:lstStyle/>
-          <a:p>
-            <a:pPr algn="ctr"/>
-          </a:p>
-        </p:txBody>
-      </p:sp>
-      <p:sp>
-        <p:nvSpPr>
-          <p:cNvPr id="15" name="TextBox 14"/>
+          <a:bodyPr rtlCol="0" anchor="ctr" lIns="0" rIns="0" tIns="0" bIns="0"/>
+          <a:lstStyle/>
+          <a:p>
+            <a:pPr algn="ctr">
+              <a:defRPr sz="2800" b="1">
+                <a:solidFill>
+                  <a:srgbClr val="FFFFFF"/>
+                </a:solidFill>
+              </a:defRPr>
+            </a:pPr>
+            <a:r>
+              <a:t>3</a:t>
+            </a:r>
+          </a:p>
+        </p:txBody>
+      </p:sp>
+      <p:sp>
+        <p:nvSpPr>
+          <p:cNvPr id="17" name="TextBox 16"/>
           <p:cNvSpPr txBox="1"/>
           <p:nvPr/>
         </p:nvSpPr>
         <p:spPr>
           <a:xfrm>
-            <a:off x="1005840" y="4160520"/>
-            <a:ext cx="4846320" cy="457200"/>
+            <a:off x="1920240" y="4846320"/>
+            <a:ext cx="9144000" cy="548640"/>
           </a:xfrm>
           <a:prstGeom prst="rect">
             <a:avLst/>
@@ -23600,7 +23824,7 @@
               <a:lnSpc>
                 <a:spcPct val="140000"/>
               </a:lnSpc>
-              <a:defRPr sz="2200" b="1">
+              <a:defRPr sz="2400" b="1">
                 <a:solidFill>
                   <a:srgbClr val="FFFFFF"/>
                 </a:solidFill>
@@ -23608,21 +23832,21 @@
               </a:defRPr>
             </a:pPr>
             <a:r>
-              <a:t>🎞  Gamma 簡報</a:t>
-            </a:r>
-          </a:p>
-        </p:txBody>
-      </p:sp>
-      <p:sp>
-        <p:nvSpPr>
-          <p:cNvPr id="16" name="TextBox 15"/>
+              <a:t>一定要自己檢查</a:t>
+            </a:r>
+          </a:p>
+        </p:txBody>
+      </p:sp>
+      <p:sp>
+        <p:nvSpPr>
+          <p:cNvPr id="18" name="TextBox 17"/>
           <p:cNvSpPr txBox="1"/>
           <p:nvPr/>
         </p:nvSpPr>
         <p:spPr>
           <a:xfrm>
-            <a:off x="1005840" y="4709160"/>
-            <a:ext cx="4846320" cy="457200"/>
+            <a:off x="1920240" y="5349240"/>
+            <a:ext cx="9144000" cy="365760"/>
           </a:xfrm>
           <a:prstGeom prst="rect">
             <a:avLst/>
@@ -23639,7 +23863,7 @@
               <a:lnSpc>
                 <a:spcPct val="140000"/>
               </a:lnSpc>
-              <a:defRPr sz="1500" b="0">
+              <a:defRPr sz="1600" b="0">
                 <a:solidFill>
                   <a:srgbClr val="BBBBCC"/>
                 </a:solidFill>
@@ -23647,296 +23871,7 @@
               </a:defRPr>
             </a:pPr>
             <a:r>
-              <a:t>Step 5 路徑 A</a:t>
-            </a:r>
-          </a:p>
-        </p:txBody>
-      </p:sp>
-      <p:sp>
-        <p:nvSpPr>
-          <p:cNvPr id="17" name="Rectangle 16"/>
-          <p:cNvSpPr/>
-          <p:nvPr/>
-        </p:nvSpPr>
-        <p:spPr>
-          <a:xfrm>
-            <a:off x="6217920" y="3931920"/>
-            <a:ext cx="5212080" cy="1371600"/>
-          </a:xfrm>
-          <a:prstGeom prst="rect">
-            <a:avLst/>
-          </a:prstGeom>
-          <a:solidFill>
-            <a:srgbClr val="222B45"/>
-          </a:solidFill>
-          <a:ln>
-            <a:noFill/>
-          </a:ln>
-        </p:spPr>
-        <p:style>
-          <a:lnRef idx="1">
-            <a:schemeClr val="accent1"/>
-          </a:lnRef>
-          <a:fillRef idx="3">
-            <a:schemeClr val="accent1"/>
-          </a:fillRef>
-          <a:effectRef idx="2">
-            <a:schemeClr val="accent1"/>
-          </a:effectRef>
-          <a:fontRef idx="minor">
-            <a:schemeClr val="lt1"/>
-          </a:fontRef>
-        </p:style>
-        <p:txBody>
-          <a:bodyPr rtlCol="0" anchor="ctr"/>
-          <a:lstStyle/>
-          <a:p>
-            <a:pPr algn="ctr"/>
-          </a:p>
-        </p:txBody>
-      </p:sp>
-      <p:sp>
-        <p:nvSpPr>
-          <p:cNvPr id="18" name="Rectangle 17"/>
-          <p:cNvSpPr/>
-          <p:nvPr/>
-        </p:nvSpPr>
-        <p:spPr>
-          <a:xfrm>
-            <a:off x="6217920" y="3931920"/>
-            <a:ext cx="5212080" cy="50800"/>
-          </a:xfrm>
-          <a:prstGeom prst="rect">
-            <a:avLst/>
-          </a:prstGeom>
-          <a:solidFill>
-            <a:srgbClr val="CC66FF"/>
-          </a:solidFill>
-          <a:ln>
-            <a:noFill/>
-          </a:ln>
-        </p:spPr>
-        <p:style>
-          <a:lnRef idx="1">
-            <a:schemeClr val="accent1"/>
-          </a:lnRef>
-          <a:fillRef idx="3">
-            <a:schemeClr val="accent1"/>
-          </a:fillRef>
-          <a:effectRef idx="2">
-            <a:schemeClr val="accent1"/>
-          </a:effectRef>
-          <a:fontRef idx="minor">
-            <a:schemeClr val="lt1"/>
-          </a:fontRef>
-        </p:style>
-        <p:txBody>
-          <a:bodyPr rtlCol="0" anchor="ctr"/>
-          <a:lstStyle/>
-          <a:p>
-            <a:pPr algn="ctr"/>
-          </a:p>
-        </p:txBody>
-      </p:sp>
-      <p:sp>
-        <p:nvSpPr>
-          <p:cNvPr id="19" name="TextBox 18"/>
-          <p:cNvSpPr txBox="1"/>
-          <p:nvPr/>
-        </p:nvSpPr>
-        <p:spPr>
-          <a:xfrm>
-            <a:off x="6492240" y="4160520"/>
-            <a:ext cx="4846320" cy="457200"/>
-          </a:xfrm>
-          <a:prstGeom prst="rect">
-            <a:avLst/>
-          </a:prstGeom>
-          <a:noFill/>
-        </p:spPr>
-        <p:txBody>
-          <a:bodyPr wrap="square" lIns="0" rIns="0" tIns="0" bIns="0">
-            <a:spAutoFit/>
-          </a:bodyPr>
-          <a:lstStyle/>
-          <a:p>
-            <a:pPr algn="l">
-              <a:lnSpc>
-                <a:spcPct val="140000"/>
-              </a:lnSpc>
-              <a:defRPr sz="2200" b="1">
-                <a:solidFill>
-                  <a:srgbClr val="FFFFFF"/>
-                </a:solidFill>
-                <a:latin typeface="Helvetica Neue"/>
-              </a:defRPr>
-            </a:pPr>
-            <a:r>
-              <a:t>🎞  Claude 簡報</a:t>
-            </a:r>
-          </a:p>
-        </p:txBody>
-      </p:sp>
-      <p:sp>
-        <p:nvSpPr>
-          <p:cNvPr id="20" name="TextBox 19"/>
-          <p:cNvSpPr txBox="1"/>
-          <p:nvPr/>
-        </p:nvSpPr>
-        <p:spPr>
-          <a:xfrm>
-            <a:off x="6492240" y="4709160"/>
-            <a:ext cx="4846320" cy="457200"/>
-          </a:xfrm>
-          <a:prstGeom prst="rect">
-            <a:avLst/>
-          </a:prstGeom>
-          <a:noFill/>
-        </p:spPr>
-        <p:txBody>
-          <a:bodyPr wrap="square" lIns="0" rIns="0" tIns="0" bIns="0">
-            <a:spAutoFit/>
-          </a:bodyPr>
-          <a:lstStyle/>
-          <a:p>
-            <a:pPr algn="l">
-              <a:lnSpc>
-                <a:spcPct val="140000"/>
-              </a:lnSpc>
-              <a:defRPr sz="1500" b="0">
-                <a:solidFill>
-                  <a:srgbClr val="BBBBCC"/>
-                </a:solidFill>
-                <a:latin typeface="Helvetica Neue"/>
-              </a:defRPr>
-            </a:pPr>
-            <a:r>
-              <a:t>Step 5 路徑 B</a:t>
-            </a:r>
-          </a:p>
-        </p:txBody>
-      </p:sp>
-      <p:sp>
-        <p:nvSpPr>
-          <p:cNvPr id="21" name="Rectangle 20"/>
-          <p:cNvSpPr/>
-          <p:nvPr/>
-        </p:nvSpPr>
-        <p:spPr>
-          <a:xfrm>
-            <a:off x="731520" y="5760720"/>
-            <a:ext cx="10515600" cy="640080"/>
-          </a:xfrm>
-          <a:prstGeom prst="rect">
-            <a:avLst/>
-          </a:prstGeom>
-          <a:solidFill>
-            <a:srgbClr val="222B45"/>
-          </a:solidFill>
-          <a:ln>
-            <a:noFill/>
-          </a:ln>
-        </p:spPr>
-        <p:style>
-          <a:lnRef idx="1">
-            <a:schemeClr val="accent1"/>
-          </a:lnRef>
-          <a:fillRef idx="3">
-            <a:schemeClr val="accent1"/>
-          </a:fillRef>
-          <a:effectRef idx="2">
-            <a:schemeClr val="accent1"/>
-          </a:effectRef>
-          <a:fontRef idx="minor">
-            <a:schemeClr val="lt1"/>
-          </a:fontRef>
-        </p:style>
-        <p:txBody>
-          <a:bodyPr rtlCol="0" anchor="ctr"/>
-          <a:lstStyle/>
-          <a:p>
-            <a:pPr algn="ctr"/>
-          </a:p>
-        </p:txBody>
-      </p:sp>
-      <p:sp>
-        <p:nvSpPr>
-          <p:cNvPr id="22" name="Rectangle 21"/>
-          <p:cNvSpPr/>
-          <p:nvPr/>
-        </p:nvSpPr>
-        <p:spPr>
-          <a:xfrm>
-            <a:off x="731520" y="5760720"/>
-            <a:ext cx="63500" cy="640080"/>
-          </a:xfrm>
-          <a:prstGeom prst="rect">
-            <a:avLst/>
-          </a:prstGeom>
-          <a:solidFill>
-            <a:srgbClr val="4ECB71"/>
-          </a:solidFill>
-          <a:ln>
-            <a:noFill/>
-          </a:ln>
-        </p:spPr>
-        <p:style>
-          <a:lnRef idx="1">
-            <a:schemeClr val="accent1"/>
-          </a:lnRef>
-          <a:fillRef idx="3">
-            <a:schemeClr val="accent1"/>
-          </a:fillRef>
-          <a:effectRef idx="2">
-            <a:schemeClr val="accent1"/>
-          </a:effectRef>
-          <a:fontRef idx="minor">
-            <a:schemeClr val="lt1"/>
-          </a:fontRef>
-        </p:style>
-        <p:txBody>
-          <a:bodyPr rtlCol="0" anchor="ctr"/>
-          <a:lstStyle/>
-          <a:p>
-            <a:pPr algn="ctr"/>
-          </a:p>
-        </p:txBody>
-      </p:sp>
-      <p:sp>
-        <p:nvSpPr>
-          <p:cNvPr id="23" name="TextBox 22"/>
-          <p:cNvSpPr txBox="1"/>
-          <p:nvPr/>
-        </p:nvSpPr>
-        <p:spPr>
-          <a:xfrm>
-            <a:off x="914400" y="5943600"/>
-            <a:ext cx="10149840" cy="274320"/>
-          </a:xfrm>
-          <a:prstGeom prst="rect">
-            <a:avLst/>
-          </a:prstGeom>
-          <a:noFill/>
-        </p:spPr>
-        <p:txBody>
-          <a:bodyPr wrap="square" lIns="0" rIns="0" tIns="0" bIns="0">
-            <a:spAutoFit/>
-          </a:bodyPr>
-          <a:lstStyle/>
-          <a:p>
-            <a:pPr algn="l">
-              <a:lnSpc>
-                <a:spcPct val="140000"/>
-              </a:lnSpc>
-              <a:defRPr sz="1500" b="0">
-                <a:solidFill>
-                  <a:srgbClr val="FFFFFF"/>
-                </a:solidFill>
-                <a:latin typeface="Helvetica Neue"/>
-              </a:defRPr>
-            </a:pPr>
-            <a:r>
-              <a:t>三小時後，你手上也會有類似的東西——而且是你自己選的題目、你自己的口吻</a:t>
+              <a:t>四個 AI 可能給你四個版本的「歷史」</a:t>
             </a:r>
           </a:p>
         </p:txBody>
@@ -23950,762 +23885,6 @@
 </file>
 
 <file path=ppt/slides/slide37.xml><?xml version="1.0" encoding="utf-8"?>
-<p:sld xmlns:a="http://schemas.openxmlformats.org/drawingml/2006/main" xmlns:p="http://schemas.openxmlformats.org/presentationml/2006/main" xmlns:r="http://schemas.openxmlformats.org/officeDocument/2006/relationships">
-  <p:cSld>
-    <p:bg>
-      <p:bgPr>
-        <a:solidFill>
-          <a:srgbClr val="1A1A2E"/>
-        </a:solidFill>
-        <a:effectLst/>
-      </p:bgPr>
-    </p:bg>
-    <p:spTree>
-      <p:nvGrpSpPr>
-        <p:cNvPr id="1" name=""/>
-        <p:cNvGrpSpPr/>
-        <p:nvPr/>
-      </p:nvGrpSpPr>
-      <p:grpSpPr/>
-      <p:sp>
-        <p:nvSpPr>
-          <p:cNvPr id="2" name="TextBox 1"/>
-          <p:cNvSpPr txBox="1"/>
-          <p:nvPr/>
-        </p:nvSpPr>
-        <p:spPr>
-          <a:xfrm>
-            <a:off x="731520" y="594360"/>
-            <a:ext cx="10058400" cy="640080"/>
-          </a:xfrm>
-          <a:prstGeom prst="rect">
-            <a:avLst/>
-          </a:prstGeom>
-          <a:noFill/>
-        </p:spPr>
-        <p:txBody>
-          <a:bodyPr wrap="square" lIns="0" rIns="0" tIns="0" bIns="0">
-            <a:spAutoFit/>
-          </a:bodyPr>
-          <a:lstStyle/>
-          <a:p>
-            <a:pPr algn="l">
-              <a:lnSpc>
-                <a:spcPct val="140000"/>
-              </a:lnSpc>
-              <a:defRPr sz="3200" b="1">
-                <a:solidFill>
-                  <a:srgbClr val="FFFFFF"/>
-                </a:solidFill>
-                <a:latin typeface="Helvetica Neue"/>
-              </a:defRPr>
-            </a:pPr>
-            <a:r>
-              <a:t>三個帶走的觀念</a:t>
-            </a:r>
-          </a:p>
-        </p:txBody>
-      </p:sp>
-      <p:sp>
-        <p:nvSpPr>
-          <p:cNvPr id="3" name="Rectangle 2"/>
-          <p:cNvSpPr/>
-          <p:nvPr/>
-        </p:nvSpPr>
-        <p:spPr>
-          <a:xfrm>
-            <a:off x="731520" y="1325880"/>
-            <a:ext cx="10515600" cy="25400"/>
-          </a:xfrm>
-          <a:prstGeom prst="rect">
-            <a:avLst/>
-          </a:prstGeom>
-          <a:solidFill>
-            <a:srgbClr val="00D2FF"/>
-          </a:solidFill>
-          <a:ln>
-            <a:noFill/>
-          </a:ln>
-        </p:spPr>
-        <p:style>
-          <a:lnRef idx="1">
-            <a:schemeClr val="accent1"/>
-          </a:lnRef>
-          <a:fillRef idx="3">
-            <a:schemeClr val="accent1"/>
-          </a:fillRef>
-          <a:effectRef idx="2">
-            <a:schemeClr val="accent1"/>
-          </a:effectRef>
-          <a:fontRef idx="minor">
-            <a:schemeClr val="lt1"/>
-          </a:fontRef>
-        </p:style>
-        <p:txBody>
-          <a:bodyPr rtlCol="0" anchor="ctr"/>
-          <a:lstStyle/>
-          <a:p>
-            <a:pPr algn="ctr"/>
-          </a:p>
-        </p:txBody>
-      </p:sp>
-      <p:sp>
-        <p:nvSpPr>
-          <p:cNvPr id="4" name="Rectangle 3"/>
-          <p:cNvSpPr/>
-          <p:nvPr/>
-        </p:nvSpPr>
-        <p:spPr>
-          <a:xfrm>
-            <a:off x="731520" y="1828800"/>
-            <a:ext cx="10515600" cy="1188720"/>
-          </a:xfrm>
-          <a:prstGeom prst="rect">
-            <a:avLst/>
-          </a:prstGeom>
-          <a:solidFill>
-            <a:srgbClr val="222B45"/>
-          </a:solidFill>
-          <a:ln>
-            <a:noFill/>
-          </a:ln>
-        </p:spPr>
-        <p:style>
-          <a:lnRef idx="1">
-            <a:schemeClr val="accent1"/>
-          </a:lnRef>
-          <a:fillRef idx="3">
-            <a:schemeClr val="accent1"/>
-          </a:fillRef>
-          <a:effectRef idx="2">
-            <a:schemeClr val="accent1"/>
-          </a:effectRef>
-          <a:fontRef idx="minor">
-            <a:schemeClr val="lt1"/>
-          </a:fontRef>
-        </p:style>
-        <p:txBody>
-          <a:bodyPr rtlCol="0" anchor="ctr"/>
-          <a:lstStyle/>
-          <a:p>
-            <a:pPr algn="ctr"/>
-          </a:p>
-        </p:txBody>
-      </p:sp>
-      <p:sp>
-        <p:nvSpPr>
-          <p:cNvPr id="5" name="Rectangle 4"/>
-          <p:cNvSpPr/>
-          <p:nvPr/>
-        </p:nvSpPr>
-        <p:spPr>
-          <a:xfrm>
-            <a:off x="731520" y="1828800"/>
-            <a:ext cx="63500" cy="1188720"/>
-          </a:xfrm>
-          <a:prstGeom prst="rect">
-            <a:avLst/>
-          </a:prstGeom>
-          <a:solidFill>
-            <a:srgbClr val="00D2FF"/>
-          </a:solidFill>
-          <a:ln>
-            <a:noFill/>
-          </a:ln>
-        </p:spPr>
-        <p:style>
-          <a:lnRef idx="1">
-            <a:schemeClr val="accent1"/>
-          </a:lnRef>
-          <a:fillRef idx="3">
-            <a:schemeClr val="accent1"/>
-          </a:fillRef>
-          <a:effectRef idx="2">
-            <a:schemeClr val="accent1"/>
-          </a:effectRef>
-          <a:fontRef idx="minor">
-            <a:schemeClr val="lt1"/>
-          </a:fontRef>
-        </p:style>
-        <p:txBody>
-          <a:bodyPr rtlCol="0" anchor="ctr"/>
-          <a:lstStyle/>
-          <a:p>
-            <a:pPr algn="ctr"/>
-          </a:p>
-        </p:txBody>
-      </p:sp>
-      <p:sp>
-        <p:nvSpPr>
-          <p:cNvPr id="6" name="Oval 5"/>
-          <p:cNvSpPr/>
-          <p:nvPr/>
-        </p:nvSpPr>
-        <p:spPr>
-          <a:xfrm>
-            <a:off x="1005840" y="2103120"/>
-            <a:ext cx="640080" cy="640080"/>
-          </a:xfrm>
-          <a:prstGeom prst="ellipse">
-            <a:avLst/>
-          </a:prstGeom>
-          <a:solidFill>
-            <a:srgbClr val="00D2FF"/>
-          </a:solidFill>
-          <a:ln>
-            <a:noFill/>
-          </a:ln>
-        </p:spPr>
-        <p:style>
-          <a:lnRef idx="1">
-            <a:schemeClr val="accent1"/>
-          </a:lnRef>
-          <a:fillRef idx="3">
-            <a:schemeClr val="accent1"/>
-          </a:fillRef>
-          <a:effectRef idx="2">
-            <a:schemeClr val="accent1"/>
-          </a:effectRef>
-          <a:fontRef idx="minor">
-            <a:schemeClr val="lt1"/>
-          </a:fontRef>
-        </p:style>
-        <p:txBody>
-          <a:bodyPr rtlCol="0" anchor="ctr" lIns="0" rIns="0" tIns="0" bIns="0"/>
-          <a:lstStyle/>
-          <a:p>
-            <a:pPr algn="ctr">
-              <a:defRPr sz="2800" b="1">
-                <a:solidFill>
-                  <a:srgbClr val="FFFFFF"/>
-                </a:solidFill>
-              </a:defRPr>
-            </a:pPr>
-            <a:r>
-              <a:t>1</a:t>
-            </a:r>
-          </a:p>
-        </p:txBody>
-      </p:sp>
-      <p:sp>
-        <p:nvSpPr>
-          <p:cNvPr id="7" name="TextBox 6"/>
-          <p:cNvSpPr txBox="1"/>
-          <p:nvPr/>
-        </p:nvSpPr>
-        <p:spPr>
-          <a:xfrm>
-            <a:off x="1920240" y="2011680"/>
-            <a:ext cx="9144000" cy="548640"/>
-          </a:xfrm>
-          <a:prstGeom prst="rect">
-            <a:avLst/>
-          </a:prstGeom>
-          <a:noFill/>
-        </p:spPr>
-        <p:txBody>
-          <a:bodyPr wrap="square" lIns="0" rIns="0" tIns="0" bIns="0">
-            <a:spAutoFit/>
-          </a:bodyPr>
-          <a:lstStyle/>
-          <a:p>
-            <a:pPr algn="l">
-              <a:lnSpc>
-                <a:spcPct val="140000"/>
-              </a:lnSpc>
-              <a:defRPr sz="2400" b="1">
-                <a:solidFill>
-                  <a:srgbClr val="FFFFFF"/>
-                </a:solidFill>
-                <a:latin typeface="Helvetica Neue"/>
-              </a:defRPr>
-            </a:pPr>
-            <a:r>
-              <a:t>AI 幫你加速，不是幫你代寫</a:t>
-            </a:r>
-          </a:p>
-        </p:txBody>
-      </p:sp>
-      <p:sp>
-        <p:nvSpPr>
-          <p:cNvPr id="8" name="TextBox 7"/>
-          <p:cNvSpPr txBox="1"/>
-          <p:nvPr/>
-        </p:nvSpPr>
-        <p:spPr>
-          <a:xfrm>
-            <a:off x="1920240" y="2514600"/>
-            <a:ext cx="9144000" cy="365760"/>
-          </a:xfrm>
-          <a:prstGeom prst="rect">
-            <a:avLst/>
-          </a:prstGeom>
-          <a:noFill/>
-        </p:spPr>
-        <p:txBody>
-          <a:bodyPr wrap="square" lIns="0" rIns="0" tIns="0" bIns="0">
-            <a:spAutoFit/>
-          </a:bodyPr>
-          <a:lstStyle/>
-          <a:p>
-            <a:pPr algn="l">
-              <a:lnSpc>
-                <a:spcPct val="140000"/>
-              </a:lnSpc>
-              <a:defRPr sz="1600" b="0">
-                <a:solidFill>
-                  <a:srgbClr val="BBBBCC"/>
-                </a:solidFill>
-                <a:latin typeface="Helvetica Neue"/>
-              </a:defRPr>
-            </a:pPr>
-            <a:r>
-              <a:t>最後掛名的是你</a:t>
-            </a:r>
-          </a:p>
-        </p:txBody>
-      </p:sp>
-      <p:sp>
-        <p:nvSpPr>
-          <p:cNvPr id="9" name="Rectangle 8"/>
-          <p:cNvSpPr/>
-          <p:nvPr/>
-        </p:nvSpPr>
-        <p:spPr>
-          <a:xfrm>
-            <a:off x="731520" y="3246120"/>
-            <a:ext cx="10515600" cy="1188720"/>
-          </a:xfrm>
-          <a:prstGeom prst="rect">
-            <a:avLst/>
-          </a:prstGeom>
-          <a:solidFill>
-            <a:srgbClr val="222B45"/>
-          </a:solidFill>
-          <a:ln>
-            <a:noFill/>
-          </a:ln>
-        </p:spPr>
-        <p:style>
-          <a:lnRef idx="1">
-            <a:schemeClr val="accent1"/>
-          </a:lnRef>
-          <a:fillRef idx="3">
-            <a:schemeClr val="accent1"/>
-          </a:fillRef>
-          <a:effectRef idx="2">
-            <a:schemeClr val="accent1"/>
-          </a:effectRef>
-          <a:fontRef idx="minor">
-            <a:schemeClr val="lt1"/>
-          </a:fontRef>
-        </p:style>
-        <p:txBody>
-          <a:bodyPr rtlCol="0" anchor="ctr"/>
-          <a:lstStyle/>
-          <a:p>
-            <a:pPr algn="ctr"/>
-          </a:p>
-        </p:txBody>
-      </p:sp>
-      <p:sp>
-        <p:nvSpPr>
-          <p:cNvPr id="10" name="Rectangle 9"/>
-          <p:cNvSpPr/>
-          <p:nvPr/>
-        </p:nvSpPr>
-        <p:spPr>
-          <a:xfrm>
-            <a:off x="731520" y="3246120"/>
-            <a:ext cx="63500" cy="1188720"/>
-          </a:xfrm>
-          <a:prstGeom prst="rect">
-            <a:avLst/>
-          </a:prstGeom>
-          <a:solidFill>
-            <a:srgbClr val="FFAA33"/>
-          </a:solidFill>
-          <a:ln>
-            <a:noFill/>
-          </a:ln>
-        </p:spPr>
-        <p:style>
-          <a:lnRef idx="1">
-            <a:schemeClr val="accent1"/>
-          </a:lnRef>
-          <a:fillRef idx="3">
-            <a:schemeClr val="accent1"/>
-          </a:fillRef>
-          <a:effectRef idx="2">
-            <a:schemeClr val="accent1"/>
-          </a:effectRef>
-          <a:fontRef idx="minor">
-            <a:schemeClr val="lt1"/>
-          </a:fontRef>
-        </p:style>
-        <p:txBody>
-          <a:bodyPr rtlCol="0" anchor="ctr"/>
-          <a:lstStyle/>
-          <a:p>
-            <a:pPr algn="ctr"/>
-          </a:p>
-        </p:txBody>
-      </p:sp>
-      <p:sp>
-        <p:nvSpPr>
-          <p:cNvPr id="11" name="Oval 10"/>
-          <p:cNvSpPr/>
-          <p:nvPr/>
-        </p:nvSpPr>
-        <p:spPr>
-          <a:xfrm>
-            <a:off x="1005840" y="3520440"/>
-            <a:ext cx="640080" cy="640080"/>
-          </a:xfrm>
-          <a:prstGeom prst="ellipse">
-            <a:avLst/>
-          </a:prstGeom>
-          <a:solidFill>
-            <a:srgbClr val="FFAA33"/>
-          </a:solidFill>
-          <a:ln>
-            <a:noFill/>
-          </a:ln>
-        </p:spPr>
-        <p:style>
-          <a:lnRef idx="1">
-            <a:schemeClr val="accent1"/>
-          </a:lnRef>
-          <a:fillRef idx="3">
-            <a:schemeClr val="accent1"/>
-          </a:fillRef>
-          <a:effectRef idx="2">
-            <a:schemeClr val="accent1"/>
-          </a:effectRef>
-          <a:fontRef idx="minor">
-            <a:schemeClr val="lt1"/>
-          </a:fontRef>
-        </p:style>
-        <p:txBody>
-          <a:bodyPr rtlCol="0" anchor="ctr" lIns="0" rIns="0" tIns="0" bIns="0"/>
-          <a:lstStyle/>
-          <a:p>
-            <a:pPr algn="ctr">
-              <a:defRPr sz="2800" b="1">
-                <a:solidFill>
-                  <a:srgbClr val="FFFFFF"/>
-                </a:solidFill>
-              </a:defRPr>
-            </a:pPr>
-            <a:r>
-              <a:t>2</a:t>
-            </a:r>
-          </a:p>
-        </p:txBody>
-      </p:sp>
-      <p:sp>
-        <p:nvSpPr>
-          <p:cNvPr id="12" name="TextBox 11"/>
-          <p:cNvSpPr txBox="1"/>
-          <p:nvPr/>
-        </p:nvSpPr>
-        <p:spPr>
-          <a:xfrm>
-            <a:off x="1920240" y="3429000"/>
-            <a:ext cx="9144000" cy="548640"/>
-          </a:xfrm>
-          <a:prstGeom prst="rect">
-            <a:avLst/>
-          </a:prstGeom>
-          <a:noFill/>
-        </p:spPr>
-        <p:txBody>
-          <a:bodyPr wrap="square" lIns="0" rIns="0" tIns="0" bIns="0">
-            <a:spAutoFit/>
-          </a:bodyPr>
-          <a:lstStyle/>
-          <a:p>
-            <a:pPr algn="l">
-              <a:lnSpc>
-                <a:spcPct val="140000"/>
-              </a:lnSpc>
-              <a:defRPr sz="2400" b="1">
-                <a:solidFill>
-                  <a:srgbClr val="FFFFFF"/>
-                </a:solidFill>
-                <a:latin typeface="Helvetica Neue"/>
-              </a:defRPr>
-            </a:pPr>
-            <a:r>
-              <a:t>好 prompt 比好工具重要</a:t>
-            </a:r>
-          </a:p>
-        </p:txBody>
-      </p:sp>
-      <p:sp>
-        <p:nvSpPr>
-          <p:cNvPr id="13" name="TextBox 12"/>
-          <p:cNvSpPr txBox="1"/>
-          <p:nvPr/>
-        </p:nvSpPr>
-        <p:spPr>
-          <a:xfrm>
-            <a:off x="1920240" y="3931920"/>
-            <a:ext cx="9144000" cy="365760"/>
-          </a:xfrm>
-          <a:prstGeom prst="rect">
-            <a:avLst/>
-          </a:prstGeom>
-          <a:noFill/>
-        </p:spPr>
-        <p:txBody>
-          <a:bodyPr wrap="square" lIns="0" rIns="0" tIns="0" bIns="0">
-            <a:spAutoFit/>
-          </a:bodyPr>
-          <a:lstStyle/>
-          <a:p>
-            <a:pPr algn="l">
-              <a:lnSpc>
-                <a:spcPct val="140000"/>
-              </a:lnSpc>
-              <a:defRPr sz="1600" b="0">
-                <a:solidFill>
-                  <a:srgbClr val="BBBBCC"/>
-                </a:solidFill>
-                <a:latin typeface="Helvetica Neue"/>
-              </a:defRPr>
-            </a:pPr>
-            <a:r>
-              <a:t>你給 AI 多少「你的樣子」，它就回給你多少</a:t>
-            </a:r>
-          </a:p>
-        </p:txBody>
-      </p:sp>
-      <p:sp>
-        <p:nvSpPr>
-          <p:cNvPr id="14" name="Rectangle 13"/>
-          <p:cNvSpPr/>
-          <p:nvPr/>
-        </p:nvSpPr>
-        <p:spPr>
-          <a:xfrm>
-            <a:off x="731520" y="4663440"/>
-            <a:ext cx="10515600" cy="1188720"/>
-          </a:xfrm>
-          <a:prstGeom prst="rect">
-            <a:avLst/>
-          </a:prstGeom>
-          <a:solidFill>
-            <a:srgbClr val="222B45"/>
-          </a:solidFill>
-          <a:ln>
-            <a:noFill/>
-          </a:ln>
-        </p:spPr>
-        <p:style>
-          <a:lnRef idx="1">
-            <a:schemeClr val="accent1"/>
-          </a:lnRef>
-          <a:fillRef idx="3">
-            <a:schemeClr val="accent1"/>
-          </a:fillRef>
-          <a:effectRef idx="2">
-            <a:schemeClr val="accent1"/>
-          </a:effectRef>
-          <a:fontRef idx="minor">
-            <a:schemeClr val="lt1"/>
-          </a:fontRef>
-        </p:style>
-        <p:txBody>
-          <a:bodyPr rtlCol="0" anchor="ctr"/>
-          <a:lstStyle/>
-          <a:p>
-            <a:pPr algn="ctr"/>
-          </a:p>
-        </p:txBody>
-      </p:sp>
-      <p:sp>
-        <p:nvSpPr>
-          <p:cNvPr id="15" name="Rectangle 14"/>
-          <p:cNvSpPr/>
-          <p:nvPr/>
-        </p:nvSpPr>
-        <p:spPr>
-          <a:xfrm>
-            <a:off x="731520" y="4663440"/>
-            <a:ext cx="63500" cy="1188720"/>
-          </a:xfrm>
-          <a:prstGeom prst="rect">
-            <a:avLst/>
-          </a:prstGeom>
-          <a:solidFill>
-            <a:srgbClr val="4ECB71"/>
-          </a:solidFill>
-          <a:ln>
-            <a:noFill/>
-          </a:ln>
-        </p:spPr>
-        <p:style>
-          <a:lnRef idx="1">
-            <a:schemeClr val="accent1"/>
-          </a:lnRef>
-          <a:fillRef idx="3">
-            <a:schemeClr val="accent1"/>
-          </a:fillRef>
-          <a:effectRef idx="2">
-            <a:schemeClr val="accent1"/>
-          </a:effectRef>
-          <a:fontRef idx="minor">
-            <a:schemeClr val="lt1"/>
-          </a:fontRef>
-        </p:style>
-        <p:txBody>
-          <a:bodyPr rtlCol="0" anchor="ctr"/>
-          <a:lstStyle/>
-          <a:p>
-            <a:pPr algn="ctr"/>
-          </a:p>
-        </p:txBody>
-      </p:sp>
-      <p:sp>
-        <p:nvSpPr>
-          <p:cNvPr id="16" name="Oval 15"/>
-          <p:cNvSpPr/>
-          <p:nvPr/>
-        </p:nvSpPr>
-        <p:spPr>
-          <a:xfrm>
-            <a:off x="1005840" y="4937760"/>
-            <a:ext cx="640080" cy="640080"/>
-          </a:xfrm>
-          <a:prstGeom prst="ellipse">
-            <a:avLst/>
-          </a:prstGeom>
-          <a:solidFill>
-            <a:srgbClr val="4ECB71"/>
-          </a:solidFill>
-          <a:ln>
-            <a:noFill/>
-          </a:ln>
-        </p:spPr>
-        <p:style>
-          <a:lnRef idx="1">
-            <a:schemeClr val="accent1"/>
-          </a:lnRef>
-          <a:fillRef idx="3">
-            <a:schemeClr val="accent1"/>
-          </a:fillRef>
-          <a:effectRef idx="2">
-            <a:schemeClr val="accent1"/>
-          </a:effectRef>
-          <a:fontRef idx="minor">
-            <a:schemeClr val="lt1"/>
-          </a:fontRef>
-        </p:style>
-        <p:txBody>
-          <a:bodyPr rtlCol="0" anchor="ctr" lIns="0" rIns="0" tIns="0" bIns="0"/>
-          <a:lstStyle/>
-          <a:p>
-            <a:pPr algn="ctr">
-              <a:defRPr sz="2800" b="1">
-                <a:solidFill>
-                  <a:srgbClr val="FFFFFF"/>
-                </a:solidFill>
-              </a:defRPr>
-            </a:pPr>
-            <a:r>
-              <a:t>3</a:t>
-            </a:r>
-          </a:p>
-        </p:txBody>
-      </p:sp>
-      <p:sp>
-        <p:nvSpPr>
-          <p:cNvPr id="17" name="TextBox 16"/>
-          <p:cNvSpPr txBox="1"/>
-          <p:nvPr/>
-        </p:nvSpPr>
-        <p:spPr>
-          <a:xfrm>
-            <a:off x="1920240" y="4846320"/>
-            <a:ext cx="9144000" cy="548640"/>
-          </a:xfrm>
-          <a:prstGeom prst="rect">
-            <a:avLst/>
-          </a:prstGeom>
-          <a:noFill/>
-        </p:spPr>
-        <p:txBody>
-          <a:bodyPr wrap="square" lIns="0" rIns="0" tIns="0" bIns="0">
-            <a:spAutoFit/>
-          </a:bodyPr>
-          <a:lstStyle/>
-          <a:p>
-            <a:pPr algn="l">
-              <a:lnSpc>
-                <a:spcPct val="140000"/>
-              </a:lnSpc>
-              <a:defRPr sz="2400" b="1">
-                <a:solidFill>
-                  <a:srgbClr val="FFFFFF"/>
-                </a:solidFill>
-                <a:latin typeface="Helvetica Neue"/>
-              </a:defRPr>
-            </a:pPr>
-            <a:r>
-              <a:t>一定要自己檢查</a:t>
-            </a:r>
-          </a:p>
-        </p:txBody>
-      </p:sp>
-      <p:sp>
-        <p:nvSpPr>
-          <p:cNvPr id="18" name="TextBox 17"/>
-          <p:cNvSpPr txBox="1"/>
-          <p:nvPr/>
-        </p:nvSpPr>
-        <p:spPr>
-          <a:xfrm>
-            <a:off x="1920240" y="5349240"/>
-            <a:ext cx="9144000" cy="365760"/>
-          </a:xfrm>
-          <a:prstGeom prst="rect">
-            <a:avLst/>
-          </a:prstGeom>
-          <a:noFill/>
-        </p:spPr>
-        <p:txBody>
-          <a:bodyPr wrap="square" lIns="0" rIns="0" tIns="0" bIns="0">
-            <a:spAutoFit/>
-          </a:bodyPr>
-          <a:lstStyle/>
-          <a:p>
-            <a:pPr algn="l">
-              <a:lnSpc>
-                <a:spcPct val="140000"/>
-              </a:lnSpc>
-              <a:defRPr sz="1600" b="0">
-                <a:solidFill>
-                  <a:srgbClr val="BBBBCC"/>
-                </a:solidFill>
-                <a:latin typeface="Helvetica Neue"/>
-              </a:defRPr>
-            </a:pPr>
-            <a:r>
-              <a:t>四個 AI 可能給你四個版本的「歷史」</a:t>
-            </a:r>
-          </a:p>
-        </p:txBody>
-      </p:sp>
-    </p:spTree>
-  </p:cSld>
-  <p:clrMapOvr>
-    <a:masterClrMapping/>
-  </p:clrMapOvr>
-</p:sld>
-</file>
-
-<file path=ppt/slides/slide38.xml><?xml version="1.0" encoding="utf-8"?>
 <p:sld xmlns:a="http://schemas.openxmlformats.org/drawingml/2006/main" xmlns:p="http://schemas.openxmlformats.org/presentationml/2006/main" xmlns:r="http://schemas.openxmlformats.org/officeDocument/2006/relationships">
   <p:cSld>
     <p:bg>

--- a/和AI作朋友-工作坊簡報.pptx
+++ b/和AI作朋友-工作坊簡報.pptx
@@ -6876,7 +6876,7 @@
             <a:avLst/>
           </a:prstGeom>
           <a:solidFill>
-            <a:srgbClr val="222B45"/>
+            <a:srgbClr val="FFFFFF"/>
           </a:solidFill>
           <a:ln>
             <a:noFill/>
@@ -6904,45 +6904,30 @@
           </a:p>
         </p:txBody>
       </p:sp>
-      <p:sp>
-        <p:nvSpPr>
-          <p:cNvPr id="7" name="TextBox 6"/>
-          <p:cNvSpPr txBox="1"/>
-          <p:nvPr/>
-        </p:nvSpPr>
-        <p:spPr>
-          <a:xfrm>
-            <a:off x="3200400" y="5486400"/>
-            <a:ext cx="1371600" cy="365760"/>
-          </a:xfrm>
-          <a:prstGeom prst="rect">
-            <a:avLst/>
-          </a:prstGeom>
-          <a:noFill/>
-        </p:spPr>
-        <p:txBody>
-          <a:bodyPr wrap="square" lIns="0" rIns="0" tIns="0" bIns="0">
-            <a:spAutoFit/>
-          </a:bodyPr>
-          <a:lstStyle/>
-          <a:p>
-            <a:pPr algn="ctr">
-              <a:lnSpc>
-                <a:spcPct val="140000"/>
-              </a:lnSpc>
-              <a:defRPr sz="1800" b="0">
-                <a:solidFill>
-                  <a:srgbClr val="9999AA"/>
-                </a:solidFill>
-                <a:latin typeface="Helvetica Neue"/>
-              </a:defRPr>
-            </a:pPr>
-            <a:r>
-              <a:t>QR</a:t>
-            </a:r>
-          </a:p>
-        </p:txBody>
-      </p:sp>
+      <p:pic>
+        <p:nvPicPr>
+          <p:cNvPr id="7" name="Picture 6" descr="qr-slides.png"/>
+          <p:cNvPicPr>
+            <a:picLocks noChangeAspect="1"/>
+          </p:cNvPicPr>
+          <p:nvPr/>
+        </p:nvPicPr>
+        <p:blipFill>
+          <a:blip r:embed="rId2"/>
+          <a:stretch>
+            <a:fillRect/>
+          </a:stretch>
+        </p:blipFill>
+        <p:spPr>
+          <a:xfrm>
+            <a:off x="3246120" y="4983480"/>
+            <a:ext cx="1280160" cy="1280160"/>
+          </a:xfrm>
+          <a:prstGeom prst="rect">
+            <a:avLst/>
+          </a:prstGeom>
+        </p:spPr>
+      </p:pic>
       <p:sp>
         <p:nvSpPr>
           <p:cNvPr id="8" name="TextBox 7"/>
@@ -7036,7 +7021,7 @@
             <a:avLst/>
           </a:prstGeom>
           <a:solidFill>
-            <a:srgbClr val="222B45"/>
+            <a:srgbClr val="FFFFFF"/>
           </a:solidFill>
           <a:ln>
             <a:noFill/>
@@ -7064,45 +7049,30 @@
           </a:p>
         </p:txBody>
       </p:sp>
-      <p:sp>
-        <p:nvSpPr>
-          <p:cNvPr id="11" name="TextBox 10"/>
-          <p:cNvSpPr txBox="1"/>
-          <p:nvPr/>
-        </p:nvSpPr>
-        <p:spPr>
-          <a:xfrm>
-            <a:off x="7132320" y="5486400"/>
-            <a:ext cx="1371600" cy="365760"/>
-          </a:xfrm>
-          <a:prstGeom prst="rect">
-            <a:avLst/>
-          </a:prstGeom>
-          <a:noFill/>
-        </p:spPr>
-        <p:txBody>
-          <a:bodyPr wrap="square" lIns="0" rIns="0" tIns="0" bIns="0">
-            <a:spAutoFit/>
-          </a:bodyPr>
-          <a:lstStyle/>
-          <a:p>
-            <a:pPr algn="ctr">
-              <a:lnSpc>
-                <a:spcPct val="140000"/>
-              </a:lnSpc>
-              <a:defRPr sz="1800" b="0">
-                <a:solidFill>
-                  <a:srgbClr val="9999AA"/>
-                </a:solidFill>
-                <a:latin typeface="Helvetica Neue"/>
-              </a:defRPr>
-            </a:pPr>
-            <a:r>
-              <a:t>QR</a:t>
-            </a:r>
-          </a:p>
-        </p:txBody>
-      </p:sp>
+      <p:pic>
+        <p:nvPicPr>
+          <p:cNvPr id="11" name="Picture 10" descr="qr-index.png"/>
+          <p:cNvPicPr>
+            <a:picLocks noChangeAspect="1"/>
+          </p:cNvPicPr>
+          <p:nvPr/>
+        </p:nvPicPr>
+        <p:blipFill>
+          <a:blip r:embed="rId3"/>
+          <a:stretch>
+            <a:fillRect/>
+          </a:stretch>
+        </p:blipFill>
+        <p:spPr>
+          <a:xfrm>
+            <a:off x="7178040" y="4983480"/>
+            <a:ext cx="1280160" cy="1280160"/>
+          </a:xfrm>
+          <a:prstGeom prst="rect">
+            <a:avLst/>
+          </a:prstGeom>
+        </p:spPr>
+      </p:pic>
       <p:sp>
         <p:nvSpPr>
           <p:cNvPr id="12" name="TextBox 11"/>
